--- a/pitch/cotton-2026/Cotton-Remote-Sensing-Pitch.pptx
+++ b/pitch/cotton-2026/Cotton-Remote-Sensing-Pitch.pptx
@@ -6860,7 +6860,7 @@
                 </a:solidFill>
                 <a:latin typeface="Arial"/>
               </a:rPr>
-              <a:t>Our cover crop threshold was set from Corn Belt literature, where winter residue sits at NDVI 0.10–0.25. In Georgia the median field with no cover crop at all peaks at 0.53 — 0.50 on cotton. Winter weeds, volunteer and a mild climate put green on ground nobody planted.</a:t>
+              <a:t>Our cover crop threshold came from Mid-Atlantic literature, where winter residue sits at NDVI 0.10–0.25. In Georgia the median field with no cover crop at all peaks at 0.53 — 0.50 on cotton. Winter weeds, volunteer and a mild climate put green on ground nobody planted.</a:t>
             </a:r>
           </a:p>
         </p:txBody>
@@ -6947,7 +6947,7 @@
                 </a:solidFill>
                 <a:latin typeface="Arial Narrow"/>
               </a:rPr>
-              <a:t>CORN BELT THRESHOLD</a:t>
+              <a:t>OUT-OF-REGION THRESHOLD</a:t>
             </a:r>
           </a:p>
         </p:txBody>
@@ -8949,7 +8949,7 @@
                           </a:solidFill>
                           <a:latin typeface="Arial"/>
                         </a:rPr>
-                        <a:t>A Corn Belt number cost us 60 false alarms on 68 fields</a:t>
+                        <a:t>An out-of-region number cost us 60 false alarms on 68 fields</a:t>
                       </a:r>
                     </a:p>
                   </a:txBody>

--- a/pitch/cotton-2026/Cotton-Remote-Sensing-Pitch.pptx
+++ b/pitch/cotton-2026/Cotton-Remote-Sensing-Pitch.pptx
@@ -21,6 +21,8 @@
     <p:sldId id="269" r:id="rId21"/>
     <p:sldId id="270" r:id="rId22"/>
     <p:sldId id="271" r:id="rId23"/>
+    <p:sldId id="272" r:id="rId24"/>
+    <p:sldId id="273" r:id="rId25"/>
   </p:sldIdLst>
   <p:sldSz cx="12191695" cy="6858000" type="screen4x3"/>
   <p:notesSz cx="6858000" cy="9144000"/>
@@ -587,7 +589,7 @@
           <a:lstStyle/>
           <a:p>
             <a:r>
-              <a:t>This shows operational maturity rather than a science result. Knowing when to refuse to answer is what a platform needs.</a:t>
+              <a:t>Stress the blind scoring and the by-field cross-validation. Technical audiences will ask; getting in front of it buys trust for the next slide.</a:t>
             </a:r>
           </a:p>
         </p:txBody>
@@ -657,7 +659,7 @@
           <a:lstStyle/>
           <a:p>
             <a:r>
-              <a:t>This is the money slide for the funding ask. The defect was invisible for the entire life of the project and took real ground truth to surface. Say that plainly: we could not have found it any other way.</a:t>
+              <a:t>Do not hide the footnote. The in-sample figures are the optimistic view; the cross-validated ones are what to plan against. Both are in the written report.</a:t>
             </a:r>
           </a:p>
         </p:txBody>
@@ -727,37 +729,7 @@
           <a:lstStyle/>
           <a:p>
             <a:r>
-              <a:t>Include this slide deliberately. An audience that has been sold remote sensing before is waiting for the catch, and showing it ourselves is worth more than any accuracy figure.</a:t>
-            </a:r>
-          </a:p>
-          <a:p/>
-          <a:p>
-            <a:r>
-              <a:t>The table is the evidence; the four named fields are the demonstration. If anyone doubts it, open the app and filter the field library on "grower-confirmed". Read the four down the columns, not across: the two with a cover crop average 0.589, the two without average 0.484. Tillage moves these four by 0.03, the cover crop by 0.11 -- the same split the 174 field-years show.</a:t>
-            </a:r>
-          </a:p>
-          <a:p/>
-          <a:p>
-            <a:r>
-              <a:t>Do not offer a ratio for how much more armor reads cover than tillage. The slide used to say 0.26 against 0.02, which took the largest cover cell and the smallest tillage cell from opposite corners of the table. Read fairly it is 0.19 against 0.09, and on marginal medians 0.200 against 0.186. The direction holds under every reading; no single multiple does, so make the point with the three cells instead.</a:t>
-            </a:r>
-          </a:p>
-          <a:p/>
-          <a:p>
-            <a:r>
-              <a:t>Do not lean on the 0.480 against 0.488 pair even though it points the right way. Eight thousandths on an index this deck calls provisional is not a number to defend in a room, and offering it invites the one objection that would cost us the rest.</a:t>
-            </a:r>
-          </a:p>
-          <a:p/>
-          <a:p>
-            <a:r>
-              <a:t>Jefferson Co. is the soft one if pressed: its 2021 phenology confidence is low, and the armor window closes three days before an estimated planting date. It still lands above both fields with no cover crop, which is the point being made.</a:t>
-            </a:r>
-          </a:p>
-          <a:p/>
-          <a:p>
-            <a:r>
-              <a:t>Be straight that four fields illustrate rather than prove. They also differ in size, county and irrigation. The 174 field-years carry the claim.</a:t>
+              <a:t>This shows operational maturity rather than a science result. Knowing when to refuse to answer is what a platform needs.</a:t>
             </a:r>
           </a:p>
         </p:txBody>
@@ -827,7 +799,7 @@
           <a:lstStyle/>
           <a:p>
             <a:r>
-              <a:t>We are asking for measurements that are cheap on the ground but impossible to synthesise from orbit. Make clear we are not asking anyone to fund a satellite.</a:t>
+              <a:t>This is the money slide for the funding ask. The defect was invisible for the entire life of the project and took real ground truth to surface. Say that plainly: we could not have found it any other way.</a:t>
             </a:r>
           </a:p>
         </p:txBody>
@@ -897,7 +869,37 @@
           <a:lstStyle/>
           <a:p>
             <a:r>
-              <a:t>Figures in brackets need filling before this is presented. Do not improvise them in the room. If pressed, offer to follow up in writing the same week.</a:t>
+              <a:t>Include this slide deliberately. An audience that has been sold remote sensing before is waiting for the catch, and showing it ourselves is worth more than any accuracy figure.</a:t>
+            </a:r>
+          </a:p>
+          <a:p/>
+          <a:p>
+            <a:r>
+              <a:t>The table is the evidence; the four named fields are the demonstration. If anyone doubts it, open the app and filter the field library on "grower-confirmed". Read the four down the columns, not across: the two with a cover crop average 0.589, the two without average 0.484. Tillage moves these four by 0.03, the cover crop by 0.11 -- the same split the 174 field-years show.</a:t>
+            </a:r>
+          </a:p>
+          <a:p/>
+          <a:p>
+            <a:r>
+              <a:t>Do not offer a ratio for how much more armor reads cover than tillage. The slide used to say 0.26 against 0.02, which took the largest cover cell and the smallest tillage cell from opposite corners of the table. Read fairly it is 0.19 against 0.09, and on marginal medians 0.200 against 0.186. The direction holds under every reading; no single multiple does, so make the point with the three cells instead.</a:t>
+            </a:r>
+          </a:p>
+          <a:p/>
+          <a:p>
+            <a:r>
+              <a:t>Do not lean on the 0.480 against 0.488 pair even though it points the right way. Eight thousandths on an index this deck calls provisional is not a number to defend in a room, and offering it invites the one objection that would cost us the rest.</a:t>
+            </a:r>
+          </a:p>
+          <a:p/>
+          <a:p>
+            <a:r>
+              <a:t>Jefferson Co. is the soft one if pressed: its 2021 phenology confidence is low, and the armor window closes three days before an estimated planting date. It still lands above both fields with no cover crop, which is the point being made.</a:t>
+            </a:r>
+          </a:p>
+          <a:p/>
+          <a:p>
+            <a:r>
+              <a:t>Be straight that four fields illustrate rather than prove. They also differ in size, county and irrigation. The 174 field-years carry the claim.</a:t>
             </a:r>
           </a:p>
         </p:txBody>
@@ -967,7 +969,7 @@
           <a:lstStyle/>
           <a:p>
             <a:r>
-              <a:t>Close on the ask, not the technology. Offer the written validation report in the room: it contains every number in this deck plus the ones that did not flatter us, and handing it over is the strongest trust signal available.</a:t>
+              <a:t>We are asking for measurements that are cheap on the ground but impossible to synthesise from orbit. Make clear we are not asking anyone to fund a satellite.</a:t>
             </a:r>
           </a:p>
         </p:txBody>
@@ -1037,6 +1039,146 @@
           <a:lstStyle/>
           <a:p>
             <a:r>
+              <a:t>Figures in brackets need filling before this is presented. Do not improvise them in the room. If pressed, offer to follow up in writing the same week.</a:t>
+            </a:r>
+          </a:p>
+        </p:txBody>
+      </p:sp>
+      <p:sp>
+        <p:nvSpPr>
+          <p:cNvPr id="4" name="Slide Number Placeholder 3"/>
+          <p:cNvSpPr>
+            <a:spLocks noGrp="1"/>
+          </p:cNvSpPr>
+          <p:nvPr>
+            <p:ph type="sldNum" idx="5" sz="quarter"/>
+          </p:nvPr>
+        </p:nvSpPr>
+        <p:spPr/>
+      </p:sp>
+    </p:spTree>
+  </p:cSld>
+  <p:clrMapOvr>
+    <a:masterClrMapping/>
+  </p:clrMapOvr>
+</p:notes>
+</file>
+
+<file path=ppt/notesSlides/notesSlide17.xml><?xml version="1.0" encoding="utf-8"?>
+<p:notes xmlns:a="http://schemas.openxmlformats.org/drawingml/2006/main" xmlns:p="http://schemas.openxmlformats.org/presentationml/2006/main" xmlns:r="http://schemas.openxmlformats.org/officeDocument/2006/relationships">
+  <p:cSld>
+    <p:spTree>
+      <p:nvGrpSpPr>
+        <p:cNvPr id="1" name=""/>
+        <p:cNvGrpSpPr/>
+        <p:nvPr/>
+      </p:nvGrpSpPr>
+      <p:grpSpPr>
+        <a:xfrm>
+          <a:off x="0" y="0"/>
+          <a:ext cx="0" cy="0"/>
+          <a:chOff x="0" y="0"/>
+          <a:chExt cx="0" cy="0"/>
+        </a:xfrm>
+      </p:grpSpPr>
+      <p:sp>
+        <p:nvSpPr>
+          <p:cNvPr id="2" name="Slide Image Placeholder 1"/>
+          <p:cNvSpPr>
+            <a:spLocks noGrp="1"/>
+          </p:cNvSpPr>
+          <p:nvPr>
+            <p:ph type="sldImg" idx="2"/>
+          </p:nvPr>
+        </p:nvSpPr>
+        <p:spPr/>
+      </p:sp>
+      <p:sp>
+        <p:nvSpPr>
+          <p:cNvPr id="3" name="Notes Placeholder 2"/>
+          <p:cNvSpPr>
+            <a:spLocks noGrp="1"/>
+          </p:cNvSpPr>
+          <p:nvPr>
+            <p:ph type="body" idx="3" sz="quarter"/>
+          </p:nvPr>
+        </p:nvSpPr>
+        <p:spPr/>
+        <p:txBody>
+          <a:bodyPr/>
+          <a:lstStyle/>
+          <a:p>
+            <a:r>
+              <a:t>Close on the ask, not the technology. Offer the written validation report in the room: it contains every number in this deck plus the ones that did not flatter us, and handing it over is the strongest trust signal available.</a:t>
+            </a:r>
+          </a:p>
+        </p:txBody>
+      </p:sp>
+      <p:sp>
+        <p:nvSpPr>
+          <p:cNvPr id="4" name="Slide Number Placeholder 3"/>
+          <p:cNvSpPr>
+            <a:spLocks noGrp="1"/>
+          </p:cNvSpPr>
+          <p:nvPr>
+            <p:ph type="sldNum" idx="5" sz="quarter"/>
+          </p:nvPr>
+        </p:nvSpPr>
+        <p:spPr/>
+      </p:sp>
+    </p:spTree>
+  </p:cSld>
+  <p:clrMapOvr>
+    <a:masterClrMapping/>
+  </p:clrMapOvr>
+</p:notes>
+</file>
+
+<file path=ppt/notesSlides/notesSlide18.xml><?xml version="1.0" encoding="utf-8"?>
+<p:notes xmlns:a="http://schemas.openxmlformats.org/drawingml/2006/main" xmlns:p="http://schemas.openxmlformats.org/presentationml/2006/main" xmlns:r="http://schemas.openxmlformats.org/officeDocument/2006/relationships">
+  <p:cSld>
+    <p:spTree>
+      <p:nvGrpSpPr>
+        <p:cNvPr id="1" name=""/>
+        <p:cNvGrpSpPr/>
+        <p:nvPr/>
+      </p:nvGrpSpPr>
+      <p:grpSpPr>
+        <a:xfrm>
+          <a:off x="0" y="0"/>
+          <a:ext cx="0" cy="0"/>
+          <a:chOff x="0" y="0"/>
+          <a:chExt cx="0" cy="0"/>
+        </a:xfrm>
+      </p:grpSpPr>
+      <p:sp>
+        <p:nvSpPr>
+          <p:cNvPr id="2" name="Slide Image Placeholder 1"/>
+          <p:cNvSpPr>
+            <a:spLocks noGrp="1"/>
+          </p:cNvSpPr>
+          <p:nvPr>
+            <p:ph type="sldImg" idx="2"/>
+          </p:nvPr>
+        </p:nvSpPr>
+        <p:spPr/>
+      </p:sp>
+      <p:sp>
+        <p:nvSpPr>
+          <p:cNvPr id="3" name="Notes Placeholder 2"/>
+          <p:cNvSpPr>
+            <a:spLocks noGrp="1"/>
+          </p:cNvSpPr>
+          <p:nvPr>
+            <p:ph type="body" idx="3" sz="quarter"/>
+          </p:nvPr>
+        </p:nvSpPr>
+        <p:spPr/>
+        <p:txBody>
+          <a:bodyPr/>
+          <a:lstStyle/>
+          <a:p>
+            <a:r>
               <a:t>Only show this if a technical evaluator is in the room. Per-field runtime of over a minute rules out a synchronous API, which is why orchestration is the largest line. The retired-risk card is the one to dwell on: the biggest contingency in the September estimate was closed by building it. Be candid that the integration row cannot be estimated from outside.</a:t>
             </a:r>
           </a:p>
@@ -1527,7 +1669,7 @@
           <a:lstStyle/>
           <a:p>
             <a:r>
-              <a:t>Stress the blind scoring and the by-field cross-validation. Technical audiences will ask; getting in front of it buys trust for the next slide.</a:t>
+              <a:t>Let this one sit on screen. The point to make out loud is that every field in the picture except the orange one is a free measurement -- no enrolment, no contact, no data request -- and that is what makes a local comparison group possible at all. The next slide ranks the orange field against the cotton among them.</a:t>
             </a:r>
           </a:p>
         </p:txBody>
@@ -1597,7 +1739,7 @@
           <a:lstStyle/>
           <a:p>
             <a:r>
-              <a:t>Do not hide the footnote. The in-sample figures are the optimistic view; the cross-validated ones are what to plan against. Both are in the written report.</a:t>
+              <a:t>This is the capability slide for anyone who asks what the data is FOR. Members tell us national and state benchmarks do not describe their farm, and this is the answer: a field against its own neighbours, matched to its own crop, with nobody else having to enrol. The catch is the one the rest of this deck is about -- the cover numbers underneath it are uncalibrated on cotton.</a:t>
             </a:r>
           </a:p>
         </p:txBody>
@@ -5223,7 +5365,7 @@
             <a:avLst/>
           </a:prstGeom>
           <a:solidFill>
-            <a:srgbClr val="FFFFFF"/>
+            <a:srgbClr val="10427C"/>
           </a:solidFill>
           <a:ln>
             <a:noFill/>
@@ -5260,8 +5402,8 @@
         </p:nvSpPr>
         <p:spPr>
           <a:xfrm>
-            <a:off x="0" y="0"/>
-            <a:ext cx="12191695" cy="1143000"/>
+            <a:off x="0" y="6510528"/>
+            <a:ext cx="4880335" cy="347472"/>
           </a:xfrm>
           <a:prstGeom prst="rect">
             <a:avLst/>
@@ -5298,114 +5440,7 @@
       </p:sp>
       <p:sp>
         <p:nvSpPr>
-          <p:cNvPr id="4" name="TextBox 3"/>
-          <p:cNvSpPr txBox="1"/>
-          <p:nvPr/>
-        </p:nvSpPr>
-        <p:spPr>
-          <a:xfrm>
-            <a:off x="502920" y="329184"/>
-            <a:ext cx="9174175" cy="566928"/>
-          </a:xfrm>
-          <a:prstGeom prst="rect">
-            <a:avLst/>
-          </a:prstGeom>
-          <a:noFill/>
-        </p:spPr>
-        <p:txBody>
-          <a:bodyPr wrap="square" lIns="0" rIns="0" tIns="0" bIns="0" anchor="t">
-            <a:spAutoFit/>
-          </a:bodyPr>
-          <a:lstStyle/>
-          <a:p>
-            <a:pPr algn="l">
-              <a:lnSpc>
-                <a:spcPct val="100000"/>
-              </a:lnSpc>
-            </a:pPr>
-            <a:r>
-              <a:rPr sz="2700" b="1">
-                <a:solidFill>
-                  <a:srgbClr val="FFFFFF"/>
-                </a:solidFill>
-                <a:latin typeface="Arial Narrow"/>
-              </a:rPr>
-              <a:t>Bad field boundaries break everything downstream</a:t>
-            </a:r>
-          </a:p>
-        </p:txBody>
-      </p:sp>
-      <p:pic>
-        <p:nvPicPr>
-          <p:cNvPr id="5" name="Picture 4" descr="FTM-H_rgb.png"/>
-          <p:cNvPicPr>
-            <a:picLocks noChangeAspect="1"/>
-          </p:cNvPicPr>
-          <p:nvPr/>
-        </p:nvPicPr>
-        <p:blipFill>
-          <a:blip r:embed="rId2"/>
-          <a:stretch>
-            <a:fillRect/>
-          </a:stretch>
-        </p:blipFill>
-        <p:spPr>
-          <a:xfrm>
-            <a:off x="9585655" y="274320"/>
-            <a:ext cx="2103120" cy="642850"/>
-          </a:xfrm>
-          <a:prstGeom prst="rect">
-            <a:avLst/>
-          </a:prstGeom>
-        </p:spPr>
-      </p:pic>
-      <p:sp>
-        <p:nvSpPr>
-          <p:cNvPr id="6" name="Rectangle 5"/>
-          <p:cNvSpPr/>
-          <p:nvPr/>
-        </p:nvSpPr>
-        <p:spPr>
-          <a:xfrm>
-            <a:off x="0" y="6510528"/>
-            <a:ext cx="4880335" cy="347472"/>
-          </a:xfrm>
-          <a:prstGeom prst="rect">
-            <a:avLst/>
-          </a:prstGeom>
-          <a:solidFill>
-            <a:srgbClr val="10427C"/>
-          </a:solidFill>
-          <a:ln>
-            <a:noFill/>
-          </a:ln>
-          <a:effectLst/>
-        </p:spPr>
-        <p:style>
-          <a:lnRef idx="1">
-            <a:schemeClr val="accent1"/>
-          </a:lnRef>
-          <a:fillRef idx="3">
-            <a:schemeClr val="accent1"/>
-          </a:fillRef>
-          <a:effectRef idx="2">
-            <a:schemeClr val="accent1"/>
-          </a:effectRef>
-          <a:fontRef idx="minor">
-            <a:schemeClr val="lt1"/>
-          </a:fontRef>
-        </p:style>
-        <p:txBody>
-          <a:bodyPr rtlCol="0" anchor="ctr"/>
-          <a:lstStyle/>
-          <a:p>
-            <a:pPr algn="ctr"/>
-          </a:p>
-        </p:txBody>
-      </p:sp>
-      <p:sp>
-        <p:nvSpPr>
-          <p:cNvPr id="7" name="Rectangle 6"/>
+          <p:cNvPr id="4" name="Rectangle 3"/>
           <p:cNvSpPr/>
           <p:nvPr/>
         </p:nvSpPr>
@@ -5449,7 +5484,7 @@
       </p:sp>
       <p:sp>
         <p:nvSpPr>
-          <p:cNvPr id="8" name="Rectangle 7"/>
+          <p:cNvPr id="5" name="Rectangle 4"/>
           <p:cNvSpPr/>
           <p:nvPr/>
         </p:nvSpPr>
@@ -5493,7 +5528,7 @@
       </p:sp>
       <p:sp>
         <p:nvSpPr>
-          <p:cNvPr id="9" name="Rectangle 8"/>
+          <p:cNvPr id="6" name="Rectangle 5"/>
           <p:cNvSpPr/>
           <p:nvPr/>
         </p:nvSpPr>
@@ -5537,7 +5572,7 @@
       </p:sp>
       <p:sp>
         <p:nvSpPr>
-          <p:cNvPr id="10" name="Rectangle 9"/>
+          <p:cNvPr id="7" name="Rectangle 6"/>
           <p:cNvSpPr/>
           <p:nvPr/>
         </p:nvSpPr>
@@ -5581,7 +5616,7 @@
       </p:sp>
       <p:sp>
         <p:nvSpPr>
-          <p:cNvPr id="11" name="Rectangle 10"/>
+          <p:cNvPr id="8" name="Rectangle 7"/>
           <p:cNvSpPr/>
           <p:nvPr/>
         </p:nvSpPr>
@@ -5625,53 +5660,14 @@
       </p:sp>
       <p:sp>
         <p:nvSpPr>
-          <p:cNvPr id="12" name="TextBox 11"/>
+          <p:cNvPr id="9" name="TextBox 8"/>
           <p:cNvSpPr txBox="1"/>
           <p:nvPr/>
         </p:nvSpPr>
         <p:spPr>
           <a:xfrm>
-            <a:off x="502920" y="1444752"/>
-            <a:ext cx="10424160" cy="457200"/>
-          </a:xfrm>
-          <a:prstGeom prst="rect">
-            <a:avLst/>
-          </a:prstGeom>
-          <a:noFill/>
-        </p:spPr>
-        <p:txBody>
-          <a:bodyPr wrap="square" lIns="0" rIns="0" tIns="0" bIns="0" anchor="t">
-            <a:spAutoFit/>
-          </a:bodyPr>
-          <a:lstStyle/>
-          <a:p>
-            <a:pPr algn="l">
-              <a:lnSpc>
-                <a:spcPct val="130000"/>
-              </a:lnSpc>
-            </a:pPr>
-            <a:r>
-              <a:rPr sz="1400" b="0">
-                <a:solidFill>
-                  <a:srgbClr val="58595B"/>
-                </a:solidFill>
-                <a:latin typeface="Arial"/>
-              </a:rPr>
-              <a:t>A boundary drawn around two management units blends two crops into one curve. We can detect that before reporting anything — and it predicts almost perfectly whether we get the crop right.</a:t>
-            </a:r>
-          </a:p>
-        </p:txBody>
-      </p:sp>
-      <p:sp>
-        <p:nvSpPr>
-          <p:cNvPr id="13" name="TextBox 12"/>
-          <p:cNvSpPr txBox="1"/>
-          <p:nvPr/>
-        </p:nvSpPr>
-        <p:spPr>
-          <a:xfrm>
-            <a:off x="502920" y="2240280"/>
-            <a:ext cx="2194560" cy="256032"/>
+            <a:off x="502920" y="685800"/>
+            <a:ext cx="10881360" cy="594360"/>
           </a:xfrm>
           <a:prstGeom prst="rect">
             <a:avLst/>
@@ -5690,188 +5686,27 @@
               </a:lnSpc>
             </a:pPr>
             <a:r>
-              <a:rPr sz="1200" b="0">
+              <a:rPr sz="3400" b="1">
                 <a:solidFill>
-                  <a:srgbClr val="58595B"/>
-                </a:solidFill>
-                <a:latin typeface="Arial"/>
-              </a:rPr>
-              <a:t>Under 60% one crop</a:t>
-            </a:r>
-          </a:p>
-        </p:txBody>
-      </p:sp>
-      <p:sp>
-        <p:nvSpPr>
-          <p:cNvPr id="14" name="Rectangle 13"/>
-          <p:cNvSpPr/>
-          <p:nvPr/>
-        </p:nvSpPr>
-        <p:spPr>
-          <a:xfrm>
-            <a:off x="2788920" y="2148840"/>
-            <a:ext cx="837498" cy="429768"/>
-          </a:xfrm>
-          <a:prstGeom prst="rect">
-            <a:avLst/>
-          </a:prstGeom>
-          <a:solidFill>
-            <a:srgbClr val="462668"/>
-          </a:solidFill>
-          <a:ln>
-            <a:noFill/>
-          </a:ln>
-          <a:effectLst/>
-        </p:spPr>
-        <p:style>
-          <a:lnRef idx="1">
-            <a:schemeClr val="accent1"/>
-          </a:lnRef>
-          <a:fillRef idx="3">
-            <a:schemeClr val="accent1"/>
-          </a:fillRef>
-          <a:effectRef idx="2">
-            <a:schemeClr val="accent1"/>
-          </a:effectRef>
-          <a:fontRef idx="minor">
-            <a:schemeClr val="lt1"/>
-          </a:fontRef>
-        </p:style>
-        <p:txBody>
-          <a:bodyPr rtlCol="0" anchor="ctr"/>
-          <a:lstStyle/>
-          <a:p>
-            <a:pPr algn="ctr"/>
-          </a:p>
-        </p:txBody>
-      </p:sp>
-      <p:sp>
-        <p:nvSpPr>
-          <p:cNvPr id="15" name="TextBox 14"/>
-          <p:cNvSpPr txBox="1"/>
-          <p:nvPr/>
-        </p:nvSpPr>
-        <p:spPr>
-          <a:xfrm>
-            <a:off x="3763578" y="2185416"/>
-            <a:ext cx="914400" cy="301752"/>
-          </a:xfrm>
-          <a:prstGeom prst="rect">
-            <a:avLst/>
-          </a:prstGeom>
-          <a:noFill/>
-        </p:spPr>
-        <p:txBody>
-          <a:bodyPr wrap="square" lIns="0" rIns="0" tIns="0" bIns="0" anchor="t">
-            <a:spAutoFit/>
-          </a:bodyPr>
-          <a:lstStyle/>
-          <a:p>
-            <a:pPr algn="l">
-              <a:lnSpc>
-                <a:spcPct val="120000"/>
-              </a:lnSpc>
-            </a:pPr>
-            <a:r>
-              <a:rPr sz="1600" b="1">
-                <a:solidFill>
-                  <a:srgbClr val="212121"/>
+                  <a:srgbClr val="FFFFFF"/>
                 </a:solidFill>
                 <a:latin typeface="Arial Narrow"/>
               </a:rPr>
-              <a:t>12.9%</a:t>
-            </a:r>
-          </a:p>
-        </p:txBody>
-      </p:sp>
-      <p:sp>
-        <p:nvSpPr>
-          <p:cNvPr id="16" name="TextBox 15"/>
-          <p:cNvSpPr txBox="1"/>
-          <p:nvPr/>
-        </p:nvSpPr>
-        <p:spPr>
-          <a:xfrm>
-            <a:off x="4632258" y="2240280"/>
-            <a:ext cx="1005840" cy="256032"/>
-          </a:xfrm>
-          <a:prstGeom prst="rect">
-            <a:avLst/>
-          </a:prstGeom>
-          <a:noFill/>
-        </p:spPr>
-        <p:txBody>
-          <a:bodyPr wrap="square" lIns="0" rIns="0" tIns="0" bIns="0" anchor="t">
-            <a:spAutoFit/>
-          </a:bodyPr>
-          <a:lstStyle/>
-          <a:p>
-            <a:pPr algn="l">
-              <a:lnSpc>
-                <a:spcPct val="120000"/>
-              </a:lnSpc>
-            </a:pPr>
-            <a:r>
-              <a:rPr sz="1000" b="0">
-                <a:solidFill>
-                  <a:srgbClr val="58595B"/>
-                </a:solidFill>
-                <a:latin typeface="Arial"/>
-              </a:rPr>
-              <a:t>31 fields</a:t>
-            </a:r>
-          </a:p>
-        </p:txBody>
-      </p:sp>
-      <p:sp>
-        <p:nvSpPr>
-          <p:cNvPr id="17" name="TextBox 16"/>
-          <p:cNvSpPr txBox="1"/>
-          <p:nvPr/>
-        </p:nvSpPr>
-        <p:spPr>
-          <a:xfrm>
-            <a:off x="502920" y="2862072"/>
-            <a:ext cx="2194560" cy="256032"/>
-          </a:xfrm>
-          <a:prstGeom prst="rect">
-            <a:avLst/>
-          </a:prstGeom>
-          <a:noFill/>
-        </p:spPr>
-        <p:txBody>
-          <a:bodyPr wrap="square" lIns="0" rIns="0" tIns="0" bIns="0" anchor="t">
-            <a:spAutoFit/>
-          </a:bodyPr>
-          <a:lstStyle/>
-          <a:p>
-            <a:pPr algn="l">
-              <a:lnSpc>
-                <a:spcPct val="120000"/>
-              </a:lnSpc>
-            </a:pPr>
-            <a:r>
-              <a:rPr sz="1200" b="0">
-                <a:solidFill>
-                  <a:srgbClr val="58595B"/>
-                </a:solidFill>
-                <a:latin typeface="Arial"/>
-              </a:rPr>
-              <a:t>60–75% one crop</a:t>
-            </a:r>
-          </a:p>
-        </p:txBody>
-      </p:sp>
-      <p:sp>
-        <p:nvSpPr>
-          <p:cNvPr id="18" name="Rectangle 17"/>
+              <a:t>Then we checked it against farmers</a:t>
+            </a:r>
+          </a:p>
+        </p:txBody>
+      </p:sp>
+      <p:sp>
+        <p:nvSpPr>
+          <p:cNvPr id="10" name="Rectangle 9"/>
           <p:cNvSpPr/>
           <p:nvPr/>
         </p:nvSpPr>
         <p:spPr>
           <a:xfrm>
-            <a:off x="2788920" y="2770632"/>
-            <a:ext cx="4674412" cy="429768"/>
+            <a:off x="502920" y="1417320"/>
+            <a:ext cx="2011680" cy="50292"/>
           </a:xfrm>
           <a:prstGeom prst="rect">
             <a:avLst/>
@@ -5908,14 +5743,101 @@
       </p:sp>
       <p:sp>
         <p:nvSpPr>
-          <p:cNvPr id="19" name="TextBox 18"/>
+          <p:cNvPr id="11" name="TextBox 10"/>
           <p:cNvSpPr txBox="1"/>
           <p:nvPr/>
         </p:nvSpPr>
         <p:spPr>
           <a:xfrm>
-            <a:off x="7600492" y="2807208"/>
-            <a:ext cx="914400" cy="301752"/>
+            <a:off x="502920" y="1737360"/>
+            <a:ext cx="10515600" cy="685800"/>
+          </a:xfrm>
+          <a:prstGeom prst="rect">
+            <a:avLst/>
+          </a:prstGeom>
+          <a:noFill/>
+        </p:spPr>
+        <p:txBody>
+          <a:bodyPr wrap="square" lIns="0" rIns="0" tIns="0" bIns="0" anchor="t">
+            <a:spAutoFit/>
+          </a:bodyPr>
+          <a:lstStyle/>
+          <a:p>
+            <a:pPr algn="l">
+              <a:lnSpc>
+                <a:spcPct val="130000"/>
+              </a:lnSpc>
+            </a:pPr>
+            <a:r>
+              <a:rPr sz="1500" b="0">
+                <a:solidFill>
+                  <a:srgbClr val="D6E0EC"/>
+                </a:solidFill>
+                <a:latin typeface="Arial"/>
+              </a:rPr>
+              <a:t>A University of Georgia grower survey gave us boundaries, crop, tillage class, cover crop and irrigation, field by field and year by year. It is the first time any of this was tested against something a farmer said.</a:t>
+            </a:r>
+          </a:p>
+        </p:txBody>
+      </p:sp>
+      <p:sp>
+        <p:nvSpPr>
+          <p:cNvPr id="12" name="Rounded Rectangle 11"/>
+          <p:cNvSpPr/>
+          <p:nvPr/>
+        </p:nvSpPr>
+        <p:spPr>
+          <a:xfrm>
+            <a:off x="502920" y="2880360"/>
+            <a:ext cx="2624328" cy="1371600"/>
+          </a:xfrm>
+          <a:prstGeom prst="roundRect">
+            <a:avLst>
+              <a:gd name="adj" fmla="val 5000"/>
+            </a:avLst>
+          </a:prstGeom>
+          <a:solidFill>
+            <a:srgbClr val="1B5596"/>
+          </a:solidFill>
+          <a:ln w="12700">
+            <a:solidFill>
+              <a:srgbClr val="1B5596"/>
+            </a:solidFill>
+          </a:ln>
+          <a:effectLst/>
+        </p:spPr>
+        <p:style>
+          <a:lnRef idx="1">
+            <a:schemeClr val="accent1"/>
+          </a:lnRef>
+          <a:fillRef idx="3">
+            <a:schemeClr val="accent1"/>
+          </a:fillRef>
+          <a:effectRef idx="2">
+            <a:schemeClr val="accent1"/>
+          </a:effectRef>
+          <a:fontRef idx="minor">
+            <a:schemeClr val="lt1"/>
+          </a:fontRef>
+        </p:style>
+        <p:txBody>
+          <a:bodyPr rtlCol="0" anchor="ctr"/>
+          <a:lstStyle/>
+          <a:p>
+            <a:pPr algn="ctr"/>
+          </a:p>
+        </p:txBody>
+      </p:sp>
+      <p:sp>
+        <p:nvSpPr>
+          <p:cNvPr id="13" name="TextBox 12"/>
+          <p:cNvSpPr txBox="1"/>
+          <p:nvPr/>
+        </p:nvSpPr>
+        <p:spPr>
+          <a:xfrm>
+            <a:off x="777240" y="3063240"/>
+            <a:ext cx="2194560" cy="603504"/>
           </a:xfrm>
           <a:prstGeom prst="rect">
             <a:avLst/>
@@ -5934,27 +5856,27 @@
               </a:lnSpc>
             </a:pPr>
             <a:r>
-              <a:rPr sz="1600" b="1">
+              <a:rPr sz="3400" b="1">
                 <a:solidFill>
-                  <a:srgbClr val="212121"/>
+                  <a:srgbClr val="FFD103"/>
                 </a:solidFill>
                 <a:latin typeface="Arial Narrow"/>
               </a:rPr>
-              <a:t>72.0%</a:t>
-            </a:r>
-          </a:p>
-        </p:txBody>
-      </p:sp>
-      <p:sp>
-        <p:nvSpPr>
-          <p:cNvPr id="20" name="TextBox 19"/>
+              <a:t>183</a:t>
+            </a:r>
+          </a:p>
+        </p:txBody>
+      </p:sp>
+      <p:sp>
+        <p:nvSpPr>
+          <p:cNvPr id="14" name="TextBox 13"/>
           <p:cNvSpPr txBox="1"/>
           <p:nvPr/>
         </p:nvSpPr>
         <p:spPr>
           <a:xfrm>
-            <a:off x="8469172" y="2862072"/>
-            <a:ext cx="1005840" cy="256032"/>
+            <a:off x="777240" y="3712463"/>
+            <a:ext cx="2194560" cy="384048"/>
           </a:xfrm>
           <a:prstGeom prst="rect">
             <a:avLst/>
@@ -5973,27 +5895,75 @@
               </a:lnSpc>
             </a:pPr>
             <a:r>
-              <a:rPr sz="1000" b="0">
+              <a:rPr sz="1200" b="0">
                 <a:solidFill>
-                  <a:srgbClr val="58595B"/>
+                  <a:srgbClr val="D6E0EC"/>
                 </a:solidFill>
                 <a:latin typeface="Arial"/>
               </a:rPr>
-              <a:t>25 fields</a:t>
-            </a:r>
-          </a:p>
-        </p:txBody>
-      </p:sp>
-      <p:sp>
-        <p:nvSpPr>
-          <p:cNvPr id="21" name="TextBox 20"/>
+              <a:t>cotton field-years</a:t>
+            </a:r>
+          </a:p>
+        </p:txBody>
+      </p:sp>
+      <p:sp>
+        <p:nvSpPr>
+          <p:cNvPr id="15" name="Rounded Rectangle 14"/>
+          <p:cNvSpPr/>
+          <p:nvPr/>
+        </p:nvSpPr>
+        <p:spPr>
+          <a:xfrm>
+            <a:off x="3310128" y="2880360"/>
+            <a:ext cx="2624328" cy="1371600"/>
+          </a:xfrm>
+          <a:prstGeom prst="roundRect">
+            <a:avLst>
+              <a:gd name="adj" fmla="val 5000"/>
+            </a:avLst>
+          </a:prstGeom>
+          <a:solidFill>
+            <a:srgbClr val="1B5596"/>
+          </a:solidFill>
+          <a:ln w="12700">
+            <a:solidFill>
+              <a:srgbClr val="1B5596"/>
+            </a:solidFill>
+          </a:ln>
+          <a:effectLst/>
+        </p:spPr>
+        <p:style>
+          <a:lnRef idx="1">
+            <a:schemeClr val="accent1"/>
+          </a:lnRef>
+          <a:fillRef idx="3">
+            <a:schemeClr val="accent1"/>
+          </a:fillRef>
+          <a:effectRef idx="2">
+            <a:schemeClr val="accent1"/>
+          </a:effectRef>
+          <a:fontRef idx="minor">
+            <a:schemeClr val="lt1"/>
+          </a:fontRef>
+        </p:style>
+        <p:txBody>
+          <a:bodyPr rtlCol="0" anchor="ctr"/>
+          <a:lstStyle/>
+          <a:p>
+            <a:pPr algn="ctr"/>
+          </a:p>
+        </p:txBody>
+      </p:sp>
+      <p:sp>
+        <p:nvSpPr>
+          <p:cNvPr id="16" name="TextBox 15"/>
           <p:cNvSpPr txBox="1"/>
           <p:nvPr/>
         </p:nvSpPr>
         <p:spPr>
           <a:xfrm>
-            <a:off x="502920" y="3483864"/>
-            <a:ext cx="2194560" cy="256032"/>
+            <a:off x="3584448" y="3063240"/>
+            <a:ext cx="2194560" cy="603504"/>
           </a:xfrm>
           <a:prstGeom prst="rect">
             <a:avLst/>
@@ -6012,36 +5982,79 @@
               </a:lnSpc>
             </a:pPr>
             <a:r>
+              <a:rPr sz="3400" b="1">
+                <a:solidFill>
+                  <a:srgbClr val="FFD103"/>
+                </a:solidFill>
+                <a:latin typeface="Arial Narrow"/>
+              </a:rPr>
+              <a:t>144</a:t>
+            </a:r>
+          </a:p>
+        </p:txBody>
+      </p:sp>
+      <p:sp>
+        <p:nvSpPr>
+          <p:cNvPr id="17" name="TextBox 16"/>
+          <p:cNvSpPr txBox="1"/>
+          <p:nvPr/>
+        </p:nvSpPr>
+        <p:spPr>
+          <a:xfrm>
+            <a:off x="3584448" y="3712463"/>
+            <a:ext cx="2194560" cy="384048"/>
+          </a:xfrm>
+          <a:prstGeom prst="rect">
+            <a:avLst/>
+          </a:prstGeom>
+          <a:noFill/>
+        </p:spPr>
+        <p:txBody>
+          <a:bodyPr wrap="square" lIns="0" rIns="0" tIns="0" bIns="0" anchor="t">
+            <a:spAutoFit/>
+          </a:bodyPr>
+          <a:lstStyle/>
+          <a:p>
+            <a:pPr algn="l">
+              <a:lnSpc>
+                <a:spcPct val="120000"/>
+              </a:lnSpc>
+            </a:pPr>
+            <a:r>
               <a:rPr sz="1200" b="0">
                 <a:solidFill>
-                  <a:srgbClr val="58595B"/>
+                  <a:srgbClr val="D6E0EC"/>
                 </a:solidFill>
                 <a:latin typeface="Arial"/>
               </a:rPr>
-              <a:t>75–90% one crop</a:t>
-            </a:r>
-          </a:p>
-        </p:txBody>
-      </p:sp>
-      <p:sp>
-        <p:nvSpPr>
-          <p:cNvPr id="22" name="Rectangle 21"/>
+              <a:t>distinct cotton fields</a:t>
+            </a:r>
+          </a:p>
+        </p:txBody>
+      </p:sp>
+      <p:sp>
+        <p:nvSpPr>
+          <p:cNvPr id="18" name="Rounded Rectangle 17"/>
           <p:cNvSpPr/>
           <p:nvPr/>
         </p:nvSpPr>
         <p:spPr>
           <a:xfrm>
-            <a:off x="2788920" y="3392424"/>
-            <a:ext cx="5843016" cy="429768"/>
-          </a:xfrm>
-          <a:prstGeom prst="rect">
-            <a:avLst/>
+            <a:off x="6117336" y="2880360"/>
+            <a:ext cx="2624328" cy="1371600"/>
+          </a:xfrm>
+          <a:prstGeom prst="roundRect">
+            <a:avLst>
+              <a:gd name="adj" fmla="val 5000"/>
+            </a:avLst>
           </a:prstGeom>
           <a:solidFill>
-            <a:srgbClr val="10427C"/>
+            <a:srgbClr val="1B5596"/>
           </a:solidFill>
-          <a:ln>
-            <a:noFill/>
+          <a:ln w="12700">
+            <a:solidFill>
+              <a:srgbClr val="1B5596"/>
+            </a:solidFill>
           </a:ln>
           <a:effectLst/>
         </p:spPr>
@@ -6069,14 +6082,14 @@
       </p:sp>
       <p:sp>
         <p:nvSpPr>
-          <p:cNvPr id="23" name="TextBox 22"/>
+          <p:cNvPr id="19" name="TextBox 18"/>
           <p:cNvSpPr txBox="1"/>
           <p:nvPr/>
         </p:nvSpPr>
         <p:spPr>
           <a:xfrm>
-            <a:off x="8769096" y="3429000"/>
-            <a:ext cx="914400" cy="301752"/>
+            <a:off x="6391655" y="3063240"/>
+            <a:ext cx="2194560" cy="603504"/>
           </a:xfrm>
           <a:prstGeom prst="rect">
             <a:avLst/>
@@ -6095,27 +6108,27 @@
               </a:lnSpc>
             </a:pPr>
             <a:r>
-              <a:rPr sz="1600" b="1">
+              <a:rPr sz="3400" b="1">
                 <a:solidFill>
-                  <a:srgbClr val="212121"/>
+                  <a:srgbClr val="FFD103"/>
                 </a:solidFill>
                 <a:latin typeface="Arial Narrow"/>
               </a:rPr>
-              <a:t>90.0%</a:t>
-            </a:r>
-          </a:p>
-        </p:txBody>
-      </p:sp>
-      <p:sp>
-        <p:nvSpPr>
-          <p:cNvPr id="24" name="TextBox 23"/>
+              <a:t>34</a:t>
+            </a:r>
+          </a:p>
+        </p:txBody>
+      </p:sp>
+      <p:sp>
+        <p:nvSpPr>
+          <p:cNvPr id="20" name="TextBox 19"/>
           <p:cNvSpPr txBox="1"/>
           <p:nvPr/>
         </p:nvSpPr>
         <p:spPr>
           <a:xfrm>
-            <a:off x="9637776" y="3483864"/>
-            <a:ext cx="1005840" cy="256032"/>
+            <a:off x="6391655" y="3712463"/>
+            <a:ext cx="2194560" cy="384048"/>
           </a:xfrm>
           <a:prstGeom prst="rect">
             <a:avLst/>
@@ -6134,27 +6147,75 @@
               </a:lnSpc>
             </a:pPr>
             <a:r>
-              <a:rPr sz="1000" b="0">
+              <a:rPr sz="1200" b="0">
                 <a:solidFill>
-                  <a:srgbClr val="58595B"/>
+                  <a:srgbClr val="D6E0EC"/>
                 </a:solidFill>
                 <a:latin typeface="Arial"/>
               </a:rPr>
-              <a:t>90 fields</a:t>
-            </a:r>
-          </a:p>
-        </p:txBody>
-      </p:sp>
-      <p:sp>
-        <p:nvSpPr>
-          <p:cNvPr id="25" name="TextBox 24"/>
+              <a:t>Georgia counties</a:t>
+            </a:r>
+          </a:p>
+        </p:txBody>
+      </p:sp>
+      <p:sp>
+        <p:nvSpPr>
+          <p:cNvPr id="21" name="Rounded Rectangle 20"/>
+          <p:cNvSpPr/>
+          <p:nvPr/>
+        </p:nvSpPr>
+        <p:spPr>
+          <a:xfrm>
+            <a:off x="8924544" y="2880360"/>
+            <a:ext cx="2624328" cy="1371600"/>
+          </a:xfrm>
+          <a:prstGeom prst="roundRect">
+            <a:avLst>
+              <a:gd name="adj" fmla="val 5000"/>
+            </a:avLst>
+          </a:prstGeom>
+          <a:solidFill>
+            <a:srgbClr val="1B5596"/>
+          </a:solidFill>
+          <a:ln w="12700">
+            <a:solidFill>
+              <a:srgbClr val="1B5596"/>
+            </a:solidFill>
+          </a:ln>
+          <a:effectLst/>
+        </p:spPr>
+        <p:style>
+          <a:lnRef idx="1">
+            <a:schemeClr val="accent1"/>
+          </a:lnRef>
+          <a:fillRef idx="3">
+            <a:schemeClr val="accent1"/>
+          </a:fillRef>
+          <a:effectRef idx="2">
+            <a:schemeClr val="accent1"/>
+          </a:effectRef>
+          <a:fontRef idx="minor">
+            <a:schemeClr val="lt1"/>
+          </a:fontRef>
+        </p:style>
+        <p:txBody>
+          <a:bodyPr rtlCol="0" anchor="ctr"/>
+          <a:lstStyle/>
+          <a:p>
+            <a:pPr algn="ctr"/>
+          </a:p>
+        </p:txBody>
+      </p:sp>
+      <p:sp>
+        <p:nvSpPr>
+          <p:cNvPr id="22" name="TextBox 21"/>
           <p:cNvSpPr txBox="1"/>
           <p:nvPr/>
         </p:nvSpPr>
         <p:spPr>
           <a:xfrm>
-            <a:off x="502920" y="4105656"/>
-            <a:ext cx="2194560" cy="256032"/>
+            <a:off x="9198864" y="3063240"/>
+            <a:ext cx="2194560" cy="603504"/>
           </a:xfrm>
           <a:prstGeom prst="rect">
             <a:avLst/>
@@ -6173,71 +6234,27 @@
               </a:lnSpc>
             </a:pPr>
             <a:r>
-              <a:rPr sz="1200" b="0">
+              <a:rPr sz="3400" b="1">
                 <a:solidFill>
-                  <a:srgbClr val="58595B"/>
+                  <a:srgbClr val="FFD103"/>
                 </a:solidFill>
-                <a:latin typeface="Arial"/>
+                <a:latin typeface="Arial Narrow"/>
               </a:rPr>
-              <a:t>Over 90% one crop</a:t>
-            </a:r>
-          </a:p>
-        </p:txBody>
-      </p:sp>
-      <p:sp>
-        <p:nvSpPr>
-          <p:cNvPr id="26" name="Rectangle 25"/>
-          <p:cNvSpPr/>
-          <p:nvPr/>
-        </p:nvSpPr>
-        <p:spPr>
-          <a:xfrm>
-            <a:off x="2788920" y="4014216"/>
-            <a:ext cx="5719663" cy="429768"/>
-          </a:xfrm>
-          <a:prstGeom prst="rect">
-            <a:avLst/>
-          </a:prstGeom>
-          <a:solidFill>
-            <a:srgbClr val="10427C"/>
-          </a:solidFill>
-          <a:ln>
-            <a:noFill/>
-          </a:ln>
-          <a:effectLst/>
-        </p:spPr>
-        <p:style>
-          <a:lnRef idx="1">
-            <a:schemeClr val="accent1"/>
-          </a:lnRef>
-          <a:fillRef idx="3">
-            <a:schemeClr val="accent1"/>
-          </a:fillRef>
-          <a:effectRef idx="2">
-            <a:schemeClr val="accent1"/>
-          </a:effectRef>
-          <a:fontRef idx="minor">
-            <a:schemeClr val="lt1"/>
-          </a:fontRef>
-        </p:style>
-        <p:txBody>
-          <a:bodyPr rtlCol="0" anchor="ctr"/>
-          <a:lstStyle/>
-          <a:p>
-            <a:pPr algn="ctr"/>
-          </a:p>
-        </p:txBody>
-      </p:sp>
-      <p:sp>
-        <p:nvSpPr>
-          <p:cNvPr id="27" name="TextBox 26"/>
+              <a:t>21,129</a:t>
+            </a:r>
+          </a:p>
+        </p:txBody>
+      </p:sp>
+      <p:sp>
+        <p:nvSpPr>
+          <p:cNvPr id="23" name="TextBox 22"/>
           <p:cNvSpPr txBox="1"/>
           <p:nvPr/>
         </p:nvSpPr>
         <p:spPr>
           <a:xfrm>
-            <a:off x="8645743" y="4050792"/>
-            <a:ext cx="914400" cy="301752"/>
+            <a:off x="9198864" y="3712463"/>
+            <a:ext cx="2194560" cy="384048"/>
           </a:xfrm>
           <a:prstGeom prst="rect">
             <a:avLst/>
@@ -6256,27 +6273,66 @@
               </a:lnSpc>
             </a:pPr>
             <a:r>
-              <a:rPr sz="1600" b="1">
+              <a:rPr sz="1200" b="0">
                 <a:solidFill>
-                  <a:srgbClr val="212121"/>
+                  <a:srgbClr val="D6E0EC"/>
                 </a:solidFill>
-                <a:latin typeface="Arial Narrow"/>
+                <a:latin typeface="Arial"/>
               </a:rPr>
-              <a:t>88.1%</a:t>
-            </a:r>
-          </a:p>
-        </p:txBody>
-      </p:sp>
-      <p:sp>
-        <p:nvSpPr>
-          <p:cNvPr id="28" name="TextBox 27"/>
+              <a:t>acres of cotton</a:t>
+            </a:r>
+          </a:p>
+        </p:txBody>
+      </p:sp>
+      <p:sp>
+        <p:nvSpPr>
+          <p:cNvPr id="24" name="TextBox 23"/>
           <p:cNvSpPr txBox="1"/>
           <p:nvPr/>
         </p:nvSpPr>
         <p:spPr>
           <a:xfrm>
-            <a:off x="9514423" y="4105656"/>
-            <a:ext cx="1005840" cy="256032"/>
+            <a:off x="502920" y="4572000"/>
+            <a:ext cx="10515600" cy="685800"/>
+          </a:xfrm>
+          <a:prstGeom prst="rect">
+            <a:avLst/>
+          </a:prstGeom>
+          <a:noFill/>
+        </p:spPr>
+        <p:txBody>
+          <a:bodyPr wrap="square" lIns="0" rIns="0" tIns="0" bIns="0" anchor="t">
+            <a:spAutoFit/>
+          </a:bodyPr>
+          <a:lstStyle/>
+          <a:p>
+            <a:pPr algn="l">
+              <a:lnSpc>
+                <a:spcPct val="135000"/>
+              </a:lnSpc>
+            </a:pPr>
+            <a:r>
+              <a:rPr sz="1400" b="0">
+                <a:solidFill>
+                  <a:srgbClr val="D6E0EC"/>
+                </a:solidFill>
+                <a:latin typeface="Arial"/>
+              </a:rPr>
+              <a:t>Every field-year was scored blind: the pipeline never saw the survey answers. Accuracy figures below are cross-validated by field, so repeat years of one farm cannot flatter the result.</a:t>
+            </a:r>
+          </a:p>
+        </p:txBody>
+      </p:sp>
+      <p:sp>
+        <p:nvSpPr>
+          <p:cNvPr id="25" name="TextBox 24"/>
+          <p:cNvSpPr txBox="1"/>
+          <p:nvPr/>
+        </p:nvSpPr>
+        <p:spPr>
+          <a:xfrm>
+            <a:off x="502920" y="6199632"/>
+            <a:ext cx="11185855" cy="256032"/>
           </a:xfrm>
           <a:prstGeom prst="rect">
             <a:avLst/>
@@ -6295,100 +6351,13 @@
               </a:lnSpc>
             </a:pPr>
             <a:r>
-              <a:rPr sz="1000" b="0">
+              <a:rPr sz="900" b="0">
                 <a:solidFill>
-                  <a:srgbClr val="58595B"/>
+                  <a:srgbClr val="D6E0EC"/>
                 </a:solidFill>
                 <a:latin typeface="Arial"/>
               </a:rPr>
-              <a:t>201 fields</a:t>
-            </a:r>
-          </a:p>
-        </p:txBody>
-      </p:sp>
-      <p:sp>
-        <p:nvSpPr>
-          <p:cNvPr id="29" name="TextBox 28"/>
-          <p:cNvSpPr txBox="1"/>
-          <p:nvPr/>
-        </p:nvSpPr>
-        <p:spPr>
-          <a:xfrm>
-            <a:off x="502920" y="4846320"/>
-            <a:ext cx="10698480" cy="731520"/>
-          </a:xfrm>
-          <a:prstGeom prst="rect">
-            <a:avLst/>
-          </a:prstGeom>
-          <a:noFill/>
-        </p:spPr>
-        <p:txBody>
-          <a:bodyPr wrap="square" lIns="0" rIns="0" tIns="0" bIns="0" anchor="t">
-            <a:spAutoFit/>
-          </a:bodyPr>
-          <a:lstStyle/>
-          <a:p>
-            <a:pPr algn="l">
-              <a:lnSpc>
-                <a:spcPct val="130000"/>
-              </a:lnSpc>
-            </a:pPr>
-            <a:r>
-              <a:rPr sz="1400" b="1">
-                <a:solidFill>
-                  <a:srgbClr val="58595B"/>
-                </a:solidFill>
-                <a:latin typeface="Arial"/>
-              </a:rPr>
-              <a:t>This is free quality control. </a:t>
-            </a:r>
-            <a:r>
-              <a:rPr sz="1400" b="0">
-                <a:solidFill>
-                  <a:srgbClr val="58595B"/>
-                </a:solidFill>
-                <a:latin typeface="Arial"/>
-              </a:rPr>
-              <a:t>Refusing to score the worst 16% of boundaries lifts crop accuracy from 80.7% to 88.7% and costs nothing but an honest “we cannot read this field”.</a:t>
-            </a:r>
-          </a:p>
-        </p:txBody>
-      </p:sp>
-      <p:sp>
-        <p:nvSpPr>
-          <p:cNvPr id="30" name="TextBox 29"/>
-          <p:cNvSpPr txBox="1"/>
-          <p:nvPr/>
-        </p:nvSpPr>
-        <p:spPr>
-          <a:xfrm>
-            <a:off x="502920" y="6199632"/>
-            <a:ext cx="11185855" cy="256032"/>
-          </a:xfrm>
-          <a:prstGeom prst="rect">
-            <a:avLst/>
-          </a:prstGeom>
-          <a:noFill/>
-        </p:spPr>
-        <p:txBody>
-          <a:bodyPr wrap="square" lIns="0" rIns="0" tIns="0" bIns="0" anchor="t">
-            <a:spAutoFit/>
-          </a:bodyPr>
-          <a:lstStyle/>
-          <a:p>
-            <a:pPr algn="l">
-              <a:lnSpc>
-                <a:spcPct val="120000"/>
-              </a:lnSpc>
-            </a:pPr>
-            <a:r>
-              <a:rPr sz="900" b="0">
-                <a:solidFill>
-                  <a:srgbClr val="58595B"/>
-                </a:solidFill>
-                <a:latin typeface="Arial"/>
-              </a:rPr>
-              <a:t>Agreement with grower-reported crop, by share of the boundary CDL assigns to a single class. All 347 field-years.</a:t>
+              <a:t>Survey years 2018–2021. Median field 82 acres. 78% irrigated.</a:t>
             </a:r>
           </a:p>
         </p:txBody>
@@ -6533,6 +6502,2274 @@
                 </a:solidFill>
                 <a:latin typeface="Arial Narrow"/>
               </a:rPr>
+              <a:t>The cotton scorecard</a:t>
+            </a:r>
+          </a:p>
+        </p:txBody>
+      </p:sp>
+      <p:pic>
+        <p:nvPicPr>
+          <p:cNvPr id="5" name="Picture 4" descr="FTM-H_rgb.png"/>
+          <p:cNvPicPr>
+            <a:picLocks noChangeAspect="1"/>
+          </p:cNvPicPr>
+          <p:nvPr/>
+        </p:nvPicPr>
+        <p:blipFill>
+          <a:blip r:embed="rId2"/>
+          <a:stretch>
+            <a:fillRect/>
+          </a:stretch>
+        </p:blipFill>
+        <p:spPr>
+          <a:xfrm>
+            <a:off x="9585655" y="274320"/>
+            <a:ext cx="2103120" cy="642850"/>
+          </a:xfrm>
+          <a:prstGeom prst="rect">
+            <a:avLst/>
+          </a:prstGeom>
+        </p:spPr>
+      </p:pic>
+      <p:sp>
+        <p:nvSpPr>
+          <p:cNvPr id="6" name="Rectangle 5"/>
+          <p:cNvSpPr/>
+          <p:nvPr/>
+        </p:nvSpPr>
+        <p:spPr>
+          <a:xfrm>
+            <a:off x="0" y="6510528"/>
+            <a:ext cx="4880335" cy="347472"/>
+          </a:xfrm>
+          <a:prstGeom prst="rect">
+            <a:avLst/>
+          </a:prstGeom>
+          <a:solidFill>
+            <a:srgbClr val="10427C"/>
+          </a:solidFill>
+          <a:ln>
+            <a:noFill/>
+          </a:ln>
+          <a:effectLst/>
+        </p:spPr>
+        <p:style>
+          <a:lnRef idx="1">
+            <a:schemeClr val="accent1"/>
+          </a:lnRef>
+          <a:fillRef idx="3">
+            <a:schemeClr val="accent1"/>
+          </a:fillRef>
+          <a:effectRef idx="2">
+            <a:schemeClr val="accent1"/>
+          </a:effectRef>
+          <a:fontRef idx="minor">
+            <a:schemeClr val="lt1"/>
+          </a:fontRef>
+        </p:style>
+        <p:txBody>
+          <a:bodyPr rtlCol="0" anchor="ctr"/>
+          <a:lstStyle/>
+          <a:p>
+            <a:pPr algn="ctr"/>
+          </a:p>
+        </p:txBody>
+      </p:sp>
+      <p:sp>
+        <p:nvSpPr>
+          <p:cNvPr id="7" name="Rectangle 6"/>
+          <p:cNvSpPr/>
+          <p:nvPr/>
+        </p:nvSpPr>
+        <p:spPr>
+          <a:xfrm>
+            <a:off x="4876678" y="6510528"/>
+            <a:ext cx="4880335" cy="347472"/>
+          </a:xfrm>
+          <a:prstGeom prst="rect">
+            <a:avLst/>
+          </a:prstGeom>
+          <a:solidFill>
+            <a:srgbClr val="F46C09"/>
+          </a:solidFill>
+          <a:ln>
+            <a:noFill/>
+          </a:ln>
+          <a:effectLst/>
+        </p:spPr>
+        <p:style>
+          <a:lnRef idx="1">
+            <a:schemeClr val="accent1"/>
+          </a:lnRef>
+          <a:fillRef idx="3">
+            <a:schemeClr val="accent1"/>
+          </a:fillRef>
+          <a:effectRef idx="2">
+            <a:schemeClr val="accent1"/>
+          </a:effectRef>
+          <a:fontRef idx="minor">
+            <a:schemeClr val="lt1"/>
+          </a:fontRef>
+        </p:style>
+        <p:txBody>
+          <a:bodyPr rtlCol="0" anchor="ctr"/>
+          <a:lstStyle/>
+          <a:p>
+            <a:pPr algn="ctr"/>
+          </a:p>
+        </p:txBody>
+      </p:sp>
+      <p:sp>
+        <p:nvSpPr>
+          <p:cNvPr id="8" name="Rectangle 7"/>
+          <p:cNvSpPr/>
+          <p:nvPr/>
+        </p:nvSpPr>
+        <p:spPr>
+          <a:xfrm>
+            <a:off x="9753356" y="6510528"/>
+            <a:ext cx="613242" cy="347472"/>
+          </a:xfrm>
+          <a:prstGeom prst="rect">
+            <a:avLst/>
+          </a:prstGeom>
+          <a:solidFill>
+            <a:srgbClr val="00B14C"/>
+          </a:solidFill>
+          <a:ln>
+            <a:noFill/>
+          </a:ln>
+          <a:effectLst/>
+        </p:spPr>
+        <p:style>
+          <a:lnRef idx="1">
+            <a:schemeClr val="accent1"/>
+          </a:lnRef>
+          <a:fillRef idx="3">
+            <a:schemeClr val="accent1"/>
+          </a:fillRef>
+          <a:effectRef idx="2">
+            <a:schemeClr val="accent1"/>
+          </a:effectRef>
+          <a:fontRef idx="minor">
+            <a:schemeClr val="lt1"/>
+          </a:fontRef>
+        </p:style>
+        <p:txBody>
+          <a:bodyPr rtlCol="0" anchor="ctr"/>
+          <a:lstStyle/>
+          <a:p>
+            <a:pPr algn="ctr"/>
+          </a:p>
+        </p:txBody>
+      </p:sp>
+      <p:sp>
+        <p:nvSpPr>
+          <p:cNvPr id="9" name="Rectangle 8"/>
+          <p:cNvSpPr/>
+          <p:nvPr/>
+        </p:nvSpPr>
+        <p:spPr>
+          <a:xfrm>
+            <a:off x="10362940" y="6510528"/>
+            <a:ext cx="613242" cy="347472"/>
+          </a:xfrm>
+          <a:prstGeom prst="rect">
+            <a:avLst/>
+          </a:prstGeom>
+          <a:solidFill>
+            <a:srgbClr val="0D9AC6"/>
+          </a:solidFill>
+          <a:ln>
+            <a:noFill/>
+          </a:ln>
+          <a:effectLst/>
+        </p:spPr>
+        <p:style>
+          <a:lnRef idx="1">
+            <a:schemeClr val="accent1"/>
+          </a:lnRef>
+          <a:fillRef idx="3">
+            <a:schemeClr val="accent1"/>
+          </a:fillRef>
+          <a:effectRef idx="2">
+            <a:schemeClr val="accent1"/>
+          </a:effectRef>
+          <a:fontRef idx="minor">
+            <a:schemeClr val="lt1"/>
+          </a:fontRef>
+        </p:style>
+        <p:txBody>
+          <a:bodyPr rtlCol="0" anchor="ctr"/>
+          <a:lstStyle/>
+          <a:p>
+            <a:pPr algn="ctr"/>
+          </a:p>
+        </p:txBody>
+      </p:sp>
+      <p:sp>
+        <p:nvSpPr>
+          <p:cNvPr id="10" name="Rectangle 9"/>
+          <p:cNvSpPr/>
+          <p:nvPr/>
+        </p:nvSpPr>
+        <p:spPr>
+          <a:xfrm>
+            <a:off x="10972525" y="6510528"/>
+            <a:ext cx="613242" cy="347472"/>
+          </a:xfrm>
+          <a:prstGeom prst="rect">
+            <a:avLst/>
+          </a:prstGeom>
+          <a:solidFill>
+            <a:srgbClr val="462668"/>
+          </a:solidFill>
+          <a:ln>
+            <a:noFill/>
+          </a:ln>
+          <a:effectLst/>
+        </p:spPr>
+        <p:style>
+          <a:lnRef idx="1">
+            <a:schemeClr val="accent1"/>
+          </a:lnRef>
+          <a:fillRef idx="3">
+            <a:schemeClr val="accent1"/>
+          </a:fillRef>
+          <a:effectRef idx="2">
+            <a:schemeClr val="accent1"/>
+          </a:effectRef>
+          <a:fontRef idx="minor">
+            <a:schemeClr val="lt1"/>
+          </a:fontRef>
+        </p:style>
+        <p:txBody>
+          <a:bodyPr rtlCol="0" anchor="ctr"/>
+          <a:lstStyle/>
+          <a:p>
+            <a:pPr algn="ctr"/>
+          </a:p>
+        </p:txBody>
+      </p:sp>
+      <p:sp>
+        <p:nvSpPr>
+          <p:cNvPr id="11" name="Rectangle 10"/>
+          <p:cNvSpPr/>
+          <p:nvPr/>
+        </p:nvSpPr>
+        <p:spPr>
+          <a:xfrm>
+            <a:off x="11582110" y="6510528"/>
+            <a:ext cx="613242" cy="347472"/>
+          </a:xfrm>
+          <a:prstGeom prst="rect">
+            <a:avLst/>
+          </a:prstGeom>
+          <a:solidFill>
+            <a:srgbClr val="FFD103"/>
+          </a:solidFill>
+          <a:ln>
+            <a:noFill/>
+          </a:ln>
+          <a:effectLst/>
+        </p:spPr>
+        <p:style>
+          <a:lnRef idx="1">
+            <a:schemeClr val="accent1"/>
+          </a:lnRef>
+          <a:fillRef idx="3">
+            <a:schemeClr val="accent1"/>
+          </a:fillRef>
+          <a:effectRef idx="2">
+            <a:schemeClr val="accent1"/>
+          </a:effectRef>
+          <a:fontRef idx="minor">
+            <a:schemeClr val="lt1"/>
+          </a:fontRef>
+        </p:style>
+        <p:txBody>
+          <a:bodyPr rtlCol="0" anchor="ctr"/>
+          <a:lstStyle/>
+          <a:p>
+            <a:pPr algn="ctr"/>
+          </a:p>
+        </p:txBody>
+      </p:sp>
+      <p:graphicFrame>
+        <p:nvGraphicFramePr>
+          <p:cNvPr id="12" name="Table 11"/>
+          <p:cNvGraphicFramePr>
+            <a:graphicFrameLocks noGrp="1"/>
+          </p:cNvGraphicFramePr>
+          <p:nvPr/>
+        </p:nvGraphicFramePr>
+        <p:xfrm>
+          <a:off x="502920" y="1444752"/>
+          <a:ext cx="10835638" cy="1792224"/>
+        </p:xfrm>
+        <a:graphic>
+          <a:graphicData uri="http://schemas.openxmlformats.org/drawingml/2006/table">
+            <a:tbl>
+              <a:tblPr firstRow="1" bandRow="1">
+                <a:tableStyleId>{5C22544A-7EE6-4342-B048-85BDC9FD1C3A}</a:tableStyleId>
+              </a:tblPr>
+              <a:tblGrid>
+                <a:gridCol w="3334043"/>
+                <a:gridCol w="1667021"/>
+                <a:gridCol w="1667021"/>
+                <a:gridCol w="2292154"/>
+                <a:gridCol w="1875399"/>
+              </a:tblGrid>
+              <a:tr h="420624">
+                <a:tc>
+                  <a:txBody>
+                    <a:bodyPr/>
+                    <a:lstStyle/>
+                    <a:p>
+                      <a:pPr algn="l"/>
+                      <a:r>
+                        <a:rPr sz="1300" b="1">
+                          <a:solidFill>
+                            <a:srgbClr val="FFFFFF"/>
+                          </a:solidFill>
+                          <a:latin typeface="Arial Narrow"/>
+                        </a:rPr>
+                        <a:t>What we measure</a:t>
+                      </a:r>
+                    </a:p>
+                  </a:txBody>
+                  <a:tcPr marL="73152" marR="73152" marT="18288" marB="18288" anchor="ctr">
+                    <a:solidFill>
+                      <a:srgbClr val="10427C"/>
+                    </a:solidFill>
+                  </a:tcPr>
+                </a:tc>
+                <a:tc>
+                  <a:txBody>
+                    <a:bodyPr/>
+                    <a:lstStyle/>
+                    <a:p>
+                      <a:pPr algn="ctr"/>
+                      <a:r>
+                        <a:rPr sz="1300" b="1">
+                          <a:solidFill>
+                            <a:srgbClr val="FFFFFF"/>
+                          </a:solidFill>
+                          <a:latin typeface="Arial Narrow"/>
+                        </a:rPr>
+                        <a:t>Field-years</a:t>
+                      </a:r>
+                    </a:p>
+                  </a:txBody>
+                  <a:tcPr marL="73152" marR="73152" marT="18288" marB="18288" anchor="ctr">
+                    <a:solidFill>
+                      <a:srgbClr val="10427C"/>
+                    </a:solidFill>
+                  </a:tcPr>
+                </a:tc>
+                <a:tc>
+                  <a:txBody>
+                    <a:bodyPr/>
+                    <a:lstStyle/>
+                    <a:p>
+                      <a:pPr algn="ctr"/>
+                      <a:r>
+                        <a:rPr sz="1300" b="1">
+                          <a:solidFill>
+                            <a:srgbClr val="FFFFFF"/>
+                          </a:solidFill>
+                          <a:latin typeface="Arial Narrow"/>
+                        </a:rPr>
+                        <a:t>Correct</a:t>
+                      </a:r>
+                    </a:p>
+                  </a:txBody>
+                  <a:tcPr marL="73152" marR="73152" marT="18288" marB="18288" anchor="ctr">
+                    <a:solidFill>
+                      <a:srgbClr val="10427C"/>
+                    </a:solidFill>
+                  </a:tcPr>
+                </a:tc>
+                <a:tc>
+                  <a:txBody>
+                    <a:bodyPr/>
+                    <a:lstStyle/>
+                    <a:p>
+                      <a:pPr algn="ctr"/>
+                      <a:r>
+                        <a:rPr sz="1300" b="1">
+                          <a:solidFill>
+                            <a:srgbClr val="FFFFFF"/>
+                          </a:solidFill>
+                          <a:latin typeface="Arial Narrow"/>
+                        </a:rPr>
+                        <a:t>Catches</a:t>
+                      </a:r>
+                    </a:p>
+                  </a:txBody>
+                  <a:tcPr marL="73152" marR="73152" marT="18288" marB="18288" anchor="ctr">
+                    <a:solidFill>
+                      <a:srgbClr val="10427C"/>
+                    </a:solidFill>
+                  </a:tcPr>
+                </a:tc>
+                <a:tc>
+                  <a:txBody>
+                    <a:bodyPr/>
+                    <a:lstStyle/>
+                    <a:p>
+                      <a:pPr algn="ctr"/>
+                      <a:r>
+                        <a:rPr sz="1300" b="1">
+                          <a:solidFill>
+                            <a:srgbClr val="FFFFFF"/>
+                          </a:solidFill>
+                          <a:latin typeface="Arial Narrow"/>
+                        </a:rPr>
+                        <a:t>False alarms</a:t>
+                      </a:r>
+                    </a:p>
+                  </a:txBody>
+                  <a:tcPr marL="73152" marR="73152" marT="18288" marB="18288" anchor="ctr">
+                    <a:solidFill>
+                      <a:srgbClr val="10427C"/>
+                    </a:solidFill>
+                  </a:tcPr>
+                </a:tc>
+              </a:tr>
+              <a:tr h="457200">
+                <a:tc>
+                  <a:txBody>
+                    <a:bodyPr/>
+                    <a:lstStyle/>
+                    <a:p>
+                      <a:pPr algn="l"/>
+                      <a:r>
+                        <a:rPr sz="1300" b="0">
+                          <a:solidFill>
+                            <a:srgbClr val="444444"/>
+                          </a:solidFill>
+                          <a:latin typeface="Arial"/>
+                        </a:rPr>
+                        <a:t>Crop is cotton</a:t>
+                      </a:r>
+                    </a:p>
+                  </a:txBody>
+                  <a:tcPr marL="73152" marR="73152" marT="18288" marB="18288" anchor="ctr">
+                    <a:solidFill>
+                      <a:srgbClr val="FFFFFF"/>
+                    </a:solidFill>
+                  </a:tcPr>
+                </a:tc>
+                <a:tc>
+                  <a:txBody>
+                    <a:bodyPr/>
+                    <a:lstStyle/>
+                    <a:p>
+                      <a:pPr algn="ctr"/>
+                      <a:r>
+                        <a:rPr sz="1300" b="0">
+                          <a:solidFill>
+                            <a:srgbClr val="444444"/>
+                          </a:solidFill>
+                          <a:latin typeface="Arial"/>
+                        </a:rPr>
+                        <a:t>183</a:t>
+                      </a:r>
+                    </a:p>
+                  </a:txBody>
+                  <a:tcPr marL="73152" marR="73152" marT="18288" marB="18288" anchor="ctr">
+                    <a:solidFill>
+                      <a:srgbClr val="FFFFFF"/>
+                    </a:solidFill>
+                  </a:tcPr>
+                </a:tc>
+                <a:tc>
+                  <a:txBody>
+                    <a:bodyPr/>
+                    <a:lstStyle/>
+                    <a:p>
+                      <a:pPr algn="ctr"/>
+                      <a:r>
+                        <a:rPr sz="1300" b="1">
+                          <a:solidFill>
+                            <a:srgbClr val="10427C"/>
+                          </a:solidFill>
+                          <a:latin typeface="Arial"/>
+                        </a:rPr>
+                        <a:t>85.2%</a:t>
+                      </a:r>
+                    </a:p>
+                  </a:txBody>
+                  <a:tcPr marL="73152" marR="73152" marT="18288" marB="18288" anchor="ctr">
+                    <a:solidFill>
+                      <a:srgbClr val="FFFFFF"/>
+                    </a:solidFill>
+                  </a:tcPr>
+                </a:tc>
+                <a:tc>
+                  <a:txBody>
+                    <a:bodyPr/>
+                    <a:lstStyle/>
+                    <a:p>
+                      <a:pPr algn="ctr"/>
+                      <a:r>
+                        <a:rPr sz="1300" b="0">
+                          <a:solidFill>
+                            <a:srgbClr val="444444"/>
+                          </a:solidFill>
+                          <a:latin typeface="Arial"/>
+                        </a:rPr>
+                        <a:t>156 of 183</a:t>
+                      </a:r>
+                    </a:p>
+                  </a:txBody>
+                  <a:tcPr marL="73152" marR="73152" marT="18288" marB="18288" anchor="ctr">
+                    <a:solidFill>
+                      <a:srgbClr val="FFFFFF"/>
+                    </a:solidFill>
+                  </a:tcPr>
+                </a:tc>
+                <a:tc>
+                  <a:txBody>
+                    <a:bodyPr/>
+                    <a:lstStyle/>
+                    <a:p>
+                      <a:pPr algn="ctr"/>
+                      <a:r>
+                        <a:rPr sz="1300" b="0">
+                          <a:solidFill>
+                            <a:srgbClr val="444444"/>
+                          </a:solidFill>
+                          <a:latin typeface="Arial"/>
+                        </a:rPr>
+                        <a:t>25</a:t>
+                      </a:r>
+                    </a:p>
+                  </a:txBody>
+                  <a:tcPr marL="73152" marR="73152" marT="18288" marB="18288" anchor="ctr">
+                    <a:solidFill>
+                      <a:srgbClr val="FFFFFF"/>
+                    </a:solidFill>
+                  </a:tcPr>
+                </a:tc>
+              </a:tr>
+              <a:tr h="457200">
+                <a:tc>
+                  <a:txBody>
+                    <a:bodyPr/>
+                    <a:lstStyle/>
+                    <a:p>
+                      <a:pPr algn="l"/>
+                      <a:r>
+                        <a:rPr sz="1300" b="0">
+                          <a:solidFill>
+                            <a:srgbClr val="444444"/>
+                          </a:solidFill>
+                          <a:latin typeface="Arial"/>
+                        </a:rPr>
+                        <a:t>Cover crop grown</a:t>
+                      </a:r>
+                    </a:p>
+                  </a:txBody>
+                  <a:tcPr marL="73152" marR="73152" marT="18288" marB="18288" anchor="ctr">
+                    <a:solidFill>
+                      <a:srgbClr val="EEEEEE"/>
+                    </a:solidFill>
+                  </a:tcPr>
+                </a:tc>
+                <a:tc>
+                  <a:txBody>
+                    <a:bodyPr/>
+                    <a:lstStyle/>
+                    <a:p>
+                      <a:pPr algn="ctr"/>
+                      <a:r>
+                        <a:rPr sz="1300" b="0">
+                          <a:solidFill>
+                            <a:srgbClr val="444444"/>
+                          </a:solidFill>
+                          <a:latin typeface="Arial"/>
+                        </a:rPr>
+                        <a:t>182</a:t>
+                      </a:r>
+                    </a:p>
+                  </a:txBody>
+                  <a:tcPr marL="73152" marR="73152" marT="18288" marB="18288" anchor="ctr">
+                    <a:solidFill>
+                      <a:srgbClr val="EEEEEE"/>
+                    </a:solidFill>
+                  </a:tcPr>
+                </a:tc>
+                <a:tc>
+                  <a:txBody>
+                    <a:bodyPr/>
+                    <a:lstStyle/>
+                    <a:p>
+                      <a:pPr algn="ctr"/>
+                      <a:r>
+                        <a:rPr sz="1300" b="1">
+                          <a:solidFill>
+                            <a:srgbClr val="10427C"/>
+                          </a:solidFill>
+                          <a:latin typeface="Arial"/>
+                        </a:rPr>
+                        <a:t>75.3%</a:t>
+                      </a:r>
+                    </a:p>
+                  </a:txBody>
+                  <a:tcPr marL="73152" marR="73152" marT="18288" marB="18288" anchor="ctr">
+                    <a:solidFill>
+                      <a:srgbClr val="EEEEEE"/>
+                    </a:solidFill>
+                  </a:tcPr>
+                </a:tc>
+                <a:tc>
+                  <a:txBody>
+                    <a:bodyPr/>
+                    <a:lstStyle/>
+                    <a:p>
+                      <a:pPr algn="ctr"/>
+                      <a:r>
+                        <a:rPr sz="1300" b="0">
+                          <a:solidFill>
+                            <a:srgbClr val="444444"/>
+                          </a:solidFill>
+                          <a:latin typeface="Arial"/>
+                        </a:rPr>
+                        <a:t>111 of 114</a:t>
+                      </a:r>
+                    </a:p>
+                  </a:txBody>
+                  <a:tcPr marL="73152" marR="73152" marT="18288" marB="18288" anchor="ctr">
+                    <a:solidFill>
+                      <a:srgbClr val="EEEEEE"/>
+                    </a:solidFill>
+                  </a:tcPr>
+                </a:tc>
+                <a:tc>
+                  <a:txBody>
+                    <a:bodyPr/>
+                    <a:lstStyle/>
+                    <a:p>
+                      <a:pPr algn="ctr"/>
+                      <a:r>
+                        <a:rPr sz="1300" b="0">
+                          <a:solidFill>
+                            <a:srgbClr val="444444"/>
+                          </a:solidFill>
+                          <a:latin typeface="Arial"/>
+                        </a:rPr>
+                        <a:t>42</a:t>
+                      </a:r>
+                    </a:p>
+                  </a:txBody>
+                  <a:tcPr marL="73152" marR="73152" marT="18288" marB="18288" anchor="ctr">
+                    <a:solidFill>
+                      <a:srgbClr val="EEEEEE"/>
+                    </a:solidFill>
+                  </a:tcPr>
+                </a:tc>
+              </a:tr>
+              <a:tr h="457200">
+                <a:tc>
+                  <a:txBody>
+                    <a:bodyPr/>
+                    <a:lstStyle/>
+                    <a:p>
+                      <a:pPr algn="l"/>
+                      <a:r>
+                        <a:rPr sz="1300" b="0">
+                          <a:solidFill>
+                            <a:srgbClr val="444444"/>
+                          </a:solidFill>
+                          <a:latin typeface="Arial"/>
+                        </a:rPr>
+                        <a:t>Conservation tillage</a:t>
+                      </a:r>
+                    </a:p>
+                  </a:txBody>
+                  <a:tcPr marL="73152" marR="73152" marT="18288" marB="18288" anchor="ctr">
+                    <a:solidFill>
+                      <a:srgbClr val="FFFFFF"/>
+                    </a:solidFill>
+                  </a:tcPr>
+                </a:tc>
+                <a:tc>
+                  <a:txBody>
+                    <a:bodyPr/>
+                    <a:lstStyle/>
+                    <a:p>
+                      <a:pPr algn="ctr"/>
+                      <a:r>
+                        <a:rPr sz="1300" b="0">
+                          <a:solidFill>
+                            <a:srgbClr val="444444"/>
+                          </a:solidFill>
+                          <a:latin typeface="Arial"/>
+                        </a:rPr>
+                        <a:t>174</a:t>
+                      </a:r>
+                    </a:p>
+                  </a:txBody>
+                  <a:tcPr marL="73152" marR="73152" marT="18288" marB="18288" anchor="ctr">
+                    <a:solidFill>
+                      <a:srgbClr val="FFFFFF"/>
+                    </a:solidFill>
+                  </a:tcPr>
+                </a:tc>
+                <a:tc>
+                  <a:txBody>
+                    <a:bodyPr/>
+                    <a:lstStyle/>
+                    <a:p>
+                      <a:pPr algn="ctr"/>
+                      <a:r>
+                        <a:rPr sz="1300" b="1">
+                          <a:solidFill>
+                            <a:srgbClr val="10427C"/>
+                          </a:solidFill>
+                          <a:latin typeface="Arial"/>
+                        </a:rPr>
+                        <a:t>76.4%</a:t>
+                      </a:r>
+                    </a:p>
+                  </a:txBody>
+                  <a:tcPr marL="73152" marR="73152" marT="18288" marB="18288" anchor="ctr">
+                    <a:solidFill>
+                      <a:srgbClr val="FFFFFF"/>
+                    </a:solidFill>
+                  </a:tcPr>
+                </a:tc>
+                <a:tc>
+                  <a:txBody>
+                    <a:bodyPr/>
+                    <a:lstStyle/>
+                    <a:p>
+                      <a:pPr algn="ctr"/>
+                      <a:r>
+                        <a:rPr sz="1300" b="0">
+                          <a:solidFill>
+                            <a:srgbClr val="444444"/>
+                          </a:solidFill>
+                          <a:latin typeface="Arial"/>
+                        </a:rPr>
+                        <a:t>105 of 126</a:t>
+                      </a:r>
+                    </a:p>
+                  </a:txBody>
+                  <a:tcPr marL="73152" marR="73152" marT="18288" marB="18288" anchor="ctr">
+                    <a:solidFill>
+                      <a:srgbClr val="FFFFFF"/>
+                    </a:solidFill>
+                  </a:tcPr>
+                </a:tc>
+                <a:tc>
+                  <a:txBody>
+                    <a:bodyPr/>
+                    <a:lstStyle/>
+                    <a:p>
+                      <a:pPr algn="ctr"/>
+                      <a:r>
+                        <a:rPr sz="1300" b="0">
+                          <a:solidFill>
+                            <a:srgbClr val="444444"/>
+                          </a:solidFill>
+                          <a:latin typeface="Arial"/>
+                        </a:rPr>
+                        <a:t>20</a:t>
+                      </a:r>
+                    </a:p>
+                  </a:txBody>
+                  <a:tcPr marL="73152" marR="73152" marT="18288" marB="18288" anchor="ctr">
+                    <a:solidFill>
+                      <a:srgbClr val="FFFFFF"/>
+                    </a:solidFill>
+                  </a:tcPr>
+                </a:tc>
+              </a:tr>
+            </a:tbl>
+          </a:graphicData>
+        </a:graphic>
+      </p:graphicFrame>
+      <p:sp>
+        <p:nvSpPr>
+          <p:cNvPr id="13" name="TextBox 12"/>
+          <p:cNvSpPr txBox="1"/>
+          <p:nvPr/>
+        </p:nvSpPr>
+        <p:spPr>
+          <a:xfrm>
+            <a:off x="502920" y="3520440"/>
+            <a:ext cx="5212080" cy="914400"/>
+          </a:xfrm>
+          <a:prstGeom prst="rect">
+            <a:avLst/>
+          </a:prstGeom>
+          <a:noFill/>
+        </p:spPr>
+        <p:txBody>
+          <a:bodyPr wrap="square" lIns="0" rIns="0" tIns="0" bIns="0" anchor="t">
+            <a:spAutoFit/>
+          </a:bodyPr>
+          <a:lstStyle/>
+          <a:p>
+            <a:pPr algn="l">
+              <a:lnSpc>
+                <a:spcPct val="130000"/>
+              </a:lnSpc>
+            </a:pPr>
+            <a:r>
+              <a:rPr sz="1300" b="1">
+                <a:solidFill>
+                  <a:srgbClr val="58595B"/>
+                </a:solidFill>
+                <a:latin typeface="Arial"/>
+              </a:rPr>
+              <a:t>Cotton is the strong crop. </a:t>
+            </a:r>
+            <a:r>
+              <a:rPr sz="1300" b="0">
+                <a:solidFill>
+                  <a:srgbClr val="58595B"/>
+                </a:solidFill>
+                <a:latin typeface="Arial"/>
+              </a:rPr>
+              <a:t>It misses almost nothing: 97% of cover crops and 83% of conservation-tilled fields are caught.</a:t>
+            </a:r>
+          </a:p>
+        </p:txBody>
+      </p:sp>
+      <p:sp>
+        <p:nvSpPr>
+          <p:cNvPr id="14" name="TextBox 13"/>
+          <p:cNvSpPr txBox="1"/>
+          <p:nvPr/>
+        </p:nvSpPr>
+        <p:spPr>
+          <a:xfrm>
+            <a:off x="6126480" y="3520440"/>
+            <a:ext cx="5212080" cy="914400"/>
+          </a:xfrm>
+          <a:prstGeom prst="rect">
+            <a:avLst/>
+          </a:prstGeom>
+          <a:noFill/>
+        </p:spPr>
+        <p:txBody>
+          <a:bodyPr wrap="square" lIns="0" rIns="0" tIns="0" bIns="0" anchor="t">
+            <a:spAutoFit/>
+          </a:bodyPr>
+          <a:lstStyle/>
+          <a:p>
+            <a:pPr algn="l">
+              <a:lnSpc>
+                <a:spcPct val="130000"/>
+              </a:lnSpc>
+            </a:pPr>
+            <a:r>
+              <a:rPr sz="1300" b="1">
+                <a:solidFill>
+                  <a:srgbClr val="58595B"/>
+                </a:solidFill>
+                <a:latin typeface="Arial"/>
+              </a:rPr>
+              <a:t>False alarms are the weak point. </a:t>
+            </a:r>
+            <a:r>
+              <a:rPr sz="1300" b="0">
+                <a:solidFill>
+                  <a:srgbClr val="58595B"/>
+                </a:solidFill>
+                <a:latin typeface="Arial"/>
+              </a:rPr>
+              <a:t>The system over-calls conservation practice, which is exactly what calibration data fixes.</a:t>
+            </a:r>
+          </a:p>
+        </p:txBody>
+      </p:sp>
+      <p:sp>
+        <p:nvSpPr>
+          <p:cNvPr id="15" name="TextBox 14"/>
+          <p:cNvSpPr txBox="1"/>
+          <p:nvPr/>
+        </p:nvSpPr>
+        <p:spPr>
+          <a:xfrm>
+            <a:off x="502920" y="6199632"/>
+            <a:ext cx="11185855" cy="256032"/>
+          </a:xfrm>
+          <a:prstGeom prst="rect">
+            <a:avLst/>
+          </a:prstGeom>
+          <a:noFill/>
+        </p:spPr>
+        <p:txBody>
+          <a:bodyPr wrap="square" lIns="0" rIns="0" tIns="0" bIns="0" anchor="t">
+            <a:spAutoFit/>
+          </a:bodyPr>
+          <a:lstStyle/>
+          <a:p>
+            <a:pPr algn="l">
+              <a:lnSpc>
+                <a:spcPct val="120000"/>
+              </a:lnSpc>
+            </a:pPr>
+            <a:r>
+              <a:rPr sz="900" b="0">
+                <a:solidFill>
+                  <a:srgbClr val="58595B"/>
+                </a:solidFill>
+                <a:latin typeface="Arial"/>
+              </a:rPr>
+              <a:t>Cover crop and tillage thresholds fitted in-sample; cross-validated they fall to 75.2% and 73.8%.</a:t>
+            </a:r>
+          </a:p>
+        </p:txBody>
+      </p:sp>
+    </p:spTree>
+  </p:cSld>
+  <p:clrMapOvr>
+    <a:masterClrMapping/>
+  </p:clrMapOvr>
+</p:sld>
+</file>
+
+<file path=ppt/slides/slide12.xml><?xml version="1.0" encoding="utf-8"?>
+<p:sld xmlns:a="http://schemas.openxmlformats.org/drawingml/2006/main" xmlns:p="http://schemas.openxmlformats.org/presentationml/2006/main" xmlns:r="http://schemas.openxmlformats.org/officeDocument/2006/relationships">
+  <p:cSld>
+    <p:spTree>
+      <p:nvGrpSpPr>
+        <p:cNvPr id="1" name=""/>
+        <p:cNvGrpSpPr/>
+        <p:nvPr/>
+      </p:nvGrpSpPr>
+      <p:grpSpPr/>
+      <p:sp>
+        <p:nvSpPr>
+          <p:cNvPr id="2" name="Rectangle 1"/>
+          <p:cNvSpPr/>
+          <p:nvPr/>
+        </p:nvSpPr>
+        <p:spPr>
+          <a:xfrm>
+            <a:off x="0" y="0"/>
+            <a:ext cx="12191695" cy="6858000"/>
+          </a:xfrm>
+          <a:prstGeom prst="rect">
+            <a:avLst/>
+          </a:prstGeom>
+          <a:solidFill>
+            <a:srgbClr val="FFFFFF"/>
+          </a:solidFill>
+          <a:ln>
+            <a:noFill/>
+          </a:ln>
+          <a:effectLst/>
+        </p:spPr>
+        <p:style>
+          <a:lnRef idx="1">
+            <a:schemeClr val="accent1"/>
+          </a:lnRef>
+          <a:fillRef idx="3">
+            <a:schemeClr val="accent1"/>
+          </a:fillRef>
+          <a:effectRef idx="2">
+            <a:schemeClr val="accent1"/>
+          </a:effectRef>
+          <a:fontRef idx="minor">
+            <a:schemeClr val="lt1"/>
+          </a:fontRef>
+        </p:style>
+        <p:txBody>
+          <a:bodyPr rtlCol="0" anchor="ctr"/>
+          <a:lstStyle/>
+          <a:p>
+            <a:pPr algn="ctr"/>
+          </a:p>
+        </p:txBody>
+      </p:sp>
+      <p:sp>
+        <p:nvSpPr>
+          <p:cNvPr id="3" name="Rectangle 2"/>
+          <p:cNvSpPr/>
+          <p:nvPr/>
+        </p:nvSpPr>
+        <p:spPr>
+          <a:xfrm>
+            <a:off x="0" y="0"/>
+            <a:ext cx="12191695" cy="1143000"/>
+          </a:xfrm>
+          <a:prstGeom prst="rect">
+            <a:avLst/>
+          </a:prstGeom>
+          <a:solidFill>
+            <a:srgbClr val="10427C"/>
+          </a:solidFill>
+          <a:ln>
+            <a:noFill/>
+          </a:ln>
+          <a:effectLst/>
+        </p:spPr>
+        <p:style>
+          <a:lnRef idx="1">
+            <a:schemeClr val="accent1"/>
+          </a:lnRef>
+          <a:fillRef idx="3">
+            <a:schemeClr val="accent1"/>
+          </a:fillRef>
+          <a:effectRef idx="2">
+            <a:schemeClr val="accent1"/>
+          </a:effectRef>
+          <a:fontRef idx="minor">
+            <a:schemeClr val="lt1"/>
+          </a:fontRef>
+        </p:style>
+        <p:txBody>
+          <a:bodyPr rtlCol="0" anchor="ctr"/>
+          <a:lstStyle/>
+          <a:p>
+            <a:pPr algn="ctr"/>
+          </a:p>
+        </p:txBody>
+      </p:sp>
+      <p:sp>
+        <p:nvSpPr>
+          <p:cNvPr id="4" name="TextBox 3"/>
+          <p:cNvSpPr txBox="1"/>
+          <p:nvPr/>
+        </p:nvSpPr>
+        <p:spPr>
+          <a:xfrm>
+            <a:off x="502920" y="329184"/>
+            <a:ext cx="9174175" cy="566928"/>
+          </a:xfrm>
+          <a:prstGeom prst="rect">
+            <a:avLst/>
+          </a:prstGeom>
+          <a:noFill/>
+        </p:spPr>
+        <p:txBody>
+          <a:bodyPr wrap="square" lIns="0" rIns="0" tIns="0" bIns="0" anchor="t">
+            <a:spAutoFit/>
+          </a:bodyPr>
+          <a:lstStyle/>
+          <a:p>
+            <a:pPr algn="l">
+              <a:lnSpc>
+                <a:spcPct val="100000"/>
+              </a:lnSpc>
+            </a:pPr>
+            <a:r>
+              <a:rPr sz="2700" b="1">
+                <a:solidFill>
+                  <a:srgbClr val="FFFFFF"/>
+                </a:solidFill>
+                <a:latin typeface="Arial Narrow"/>
+              </a:rPr>
+              <a:t>Bad field boundaries break everything downstream</a:t>
+            </a:r>
+          </a:p>
+        </p:txBody>
+      </p:sp>
+      <p:pic>
+        <p:nvPicPr>
+          <p:cNvPr id="5" name="Picture 4" descr="FTM-H_rgb.png"/>
+          <p:cNvPicPr>
+            <a:picLocks noChangeAspect="1"/>
+          </p:cNvPicPr>
+          <p:nvPr/>
+        </p:nvPicPr>
+        <p:blipFill>
+          <a:blip r:embed="rId2"/>
+          <a:stretch>
+            <a:fillRect/>
+          </a:stretch>
+        </p:blipFill>
+        <p:spPr>
+          <a:xfrm>
+            <a:off x="9585655" y="274320"/>
+            <a:ext cx="2103120" cy="642850"/>
+          </a:xfrm>
+          <a:prstGeom prst="rect">
+            <a:avLst/>
+          </a:prstGeom>
+        </p:spPr>
+      </p:pic>
+      <p:sp>
+        <p:nvSpPr>
+          <p:cNvPr id="6" name="Rectangle 5"/>
+          <p:cNvSpPr/>
+          <p:nvPr/>
+        </p:nvSpPr>
+        <p:spPr>
+          <a:xfrm>
+            <a:off x="0" y="6510528"/>
+            <a:ext cx="4880335" cy="347472"/>
+          </a:xfrm>
+          <a:prstGeom prst="rect">
+            <a:avLst/>
+          </a:prstGeom>
+          <a:solidFill>
+            <a:srgbClr val="10427C"/>
+          </a:solidFill>
+          <a:ln>
+            <a:noFill/>
+          </a:ln>
+          <a:effectLst/>
+        </p:spPr>
+        <p:style>
+          <a:lnRef idx="1">
+            <a:schemeClr val="accent1"/>
+          </a:lnRef>
+          <a:fillRef idx="3">
+            <a:schemeClr val="accent1"/>
+          </a:fillRef>
+          <a:effectRef idx="2">
+            <a:schemeClr val="accent1"/>
+          </a:effectRef>
+          <a:fontRef idx="minor">
+            <a:schemeClr val="lt1"/>
+          </a:fontRef>
+        </p:style>
+        <p:txBody>
+          <a:bodyPr rtlCol="0" anchor="ctr"/>
+          <a:lstStyle/>
+          <a:p>
+            <a:pPr algn="ctr"/>
+          </a:p>
+        </p:txBody>
+      </p:sp>
+      <p:sp>
+        <p:nvSpPr>
+          <p:cNvPr id="7" name="Rectangle 6"/>
+          <p:cNvSpPr/>
+          <p:nvPr/>
+        </p:nvSpPr>
+        <p:spPr>
+          <a:xfrm>
+            <a:off x="4876678" y="6510528"/>
+            <a:ext cx="4880335" cy="347472"/>
+          </a:xfrm>
+          <a:prstGeom prst="rect">
+            <a:avLst/>
+          </a:prstGeom>
+          <a:solidFill>
+            <a:srgbClr val="F46C09"/>
+          </a:solidFill>
+          <a:ln>
+            <a:noFill/>
+          </a:ln>
+          <a:effectLst/>
+        </p:spPr>
+        <p:style>
+          <a:lnRef idx="1">
+            <a:schemeClr val="accent1"/>
+          </a:lnRef>
+          <a:fillRef idx="3">
+            <a:schemeClr val="accent1"/>
+          </a:fillRef>
+          <a:effectRef idx="2">
+            <a:schemeClr val="accent1"/>
+          </a:effectRef>
+          <a:fontRef idx="minor">
+            <a:schemeClr val="lt1"/>
+          </a:fontRef>
+        </p:style>
+        <p:txBody>
+          <a:bodyPr rtlCol="0" anchor="ctr"/>
+          <a:lstStyle/>
+          <a:p>
+            <a:pPr algn="ctr"/>
+          </a:p>
+        </p:txBody>
+      </p:sp>
+      <p:sp>
+        <p:nvSpPr>
+          <p:cNvPr id="8" name="Rectangle 7"/>
+          <p:cNvSpPr/>
+          <p:nvPr/>
+        </p:nvSpPr>
+        <p:spPr>
+          <a:xfrm>
+            <a:off x="9753356" y="6510528"/>
+            <a:ext cx="613242" cy="347472"/>
+          </a:xfrm>
+          <a:prstGeom prst="rect">
+            <a:avLst/>
+          </a:prstGeom>
+          <a:solidFill>
+            <a:srgbClr val="00B14C"/>
+          </a:solidFill>
+          <a:ln>
+            <a:noFill/>
+          </a:ln>
+          <a:effectLst/>
+        </p:spPr>
+        <p:style>
+          <a:lnRef idx="1">
+            <a:schemeClr val="accent1"/>
+          </a:lnRef>
+          <a:fillRef idx="3">
+            <a:schemeClr val="accent1"/>
+          </a:fillRef>
+          <a:effectRef idx="2">
+            <a:schemeClr val="accent1"/>
+          </a:effectRef>
+          <a:fontRef idx="minor">
+            <a:schemeClr val="lt1"/>
+          </a:fontRef>
+        </p:style>
+        <p:txBody>
+          <a:bodyPr rtlCol="0" anchor="ctr"/>
+          <a:lstStyle/>
+          <a:p>
+            <a:pPr algn="ctr"/>
+          </a:p>
+        </p:txBody>
+      </p:sp>
+      <p:sp>
+        <p:nvSpPr>
+          <p:cNvPr id="9" name="Rectangle 8"/>
+          <p:cNvSpPr/>
+          <p:nvPr/>
+        </p:nvSpPr>
+        <p:spPr>
+          <a:xfrm>
+            <a:off x="10362940" y="6510528"/>
+            <a:ext cx="613242" cy="347472"/>
+          </a:xfrm>
+          <a:prstGeom prst="rect">
+            <a:avLst/>
+          </a:prstGeom>
+          <a:solidFill>
+            <a:srgbClr val="0D9AC6"/>
+          </a:solidFill>
+          <a:ln>
+            <a:noFill/>
+          </a:ln>
+          <a:effectLst/>
+        </p:spPr>
+        <p:style>
+          <a:lnRef idx="1">
+            <a:schemeClr val="accent1"/>
+          </a:lnRef>
+          <a:fillRef idx="3">
+            <a:schemeClr val="accent1"/>
+          </a:fillRef>
+          <a:effectRef idx="2">
+            <a:schemeClr val="accent1"/>
+          </a:effectRef>
+          <a:fontRef idx="minor">
+            <a:schemeClr val="lt1"/>
+          </a:fontRef>
+        </p:style>
+        <p:txBody>
+          <a:bodyPr rtlCol="0" anchor="ctr"/>
+          <a:lstStyle/>
+          <a:p>
+            <a:pPr algn="ctr"/>
+          </a:p>
+        </p:txBody>
+      </p:sp>
+      <p:sp>
+        <p:nvSpPr>
+          <p:cNvPr id="10" name="Rectangle 9"/>
+          <p:cNvSpPr/>
+          <p:nvPr/>
+        </p:nvSpPr>
+        <p:spPr>
+          <a:xfrm>
+            <a:off x="10972525" y="6510528"/>
+            <a:ext cx="613242" cy="347472"/>
+          </a:xfrm>
+          <a:prstGeom prst="rect">
+            <a:avLst/>
+          </a:prstGeom>
+          <a:solidFill>
+            <a:srgbClr val="462668"/>
+          </a:solidFill>
+          <a:ln>
+            <a:noFill/>
+          </a:ln>
+          <a:effectLst/>
+        </p:spPr>
+        <p:style>
+          <a:lnRef idx="1">
+            <a:schemeClr val="accent1"/>
+          </a:lnRef>
+          <a:fillRef idx="3">
+            <a:schemeClr val="accent1"/>
+          </a:fillRef>
+          <a:effectRef idx="2">
+            <a:schemeClr val="accent1"/>
+          </a:effectRef>
+          <a:fontRef idx="minor">
+            <a:schemeClr val="lt1"/>
+          </a:fontRef>
+        </p:style>
+        <p:txBody>
+          <a:bodyPr rtlCol="0" anchor="ctr"/>
+          <a:lstStyle/>
+          <a:p>
+            <a:pPr algn="ctr"/>
+          </a:p>
+        </p:txBody>
+      </p:sp>
+      <p:sp>
+        <p:nvSpPr>
+          <p:cNvPr id="11" name="Rectangle 10"/>
+          <p:cNvSpPr/>
+          <p:nvPr/>
+        </p:nvSpPr>
+        <p:spPr>
+          <a:xfrm>
+            <a:off x="11582110" y="6510528"/>
+            <a:ext cx="613242" cy="347472"/>
+          </a:xfrm>
+          <a:prstGeom prst="rect">
+            <a:avLst/>
+          </a:prstGeom>
+          <a:solidFill>
+            <a:srgbClr val="FFD103"/>
+          </a:solidFill>
+          <a:ln>
+            <a:noFill/>
+          </a:ln>
+          <a:effectLst/>
+        </p:spPr>
+        <p:style>
+          <a:lnRef idx="1">
+            <a:schemeClr val="accent1"/>
+          </a:lnRef>
+          <a:fillRef idx="3">
+            <a:schemeClr val="accent1"/>
+          </a:fillRef>
+          <a:effectRef idx="2">
+            <a:schemeClr val="accent1"/>
+          </a:effectRef>
+          <a:fontRef idx="minor">
+            <a:schemeClr val="lt1"/>
+          </a:fontRef>
+        </p:style>
+        <p:txBody>
+          <a:bodyPr rtlCol="0" anchor="ctr"/>
+          <a:lstStyle/>
+          <a:p>
+            <a:pPr algn="ctr"/>
+          </a:p>
+        </p:txBody>
+      </p:sp>
+      <p:sp>
+        <p:nvSpPr>
+          <p:cNvPr id="12" name="TextBox 11"/>
+          <p:cNvSpPr txBox="1"/>
+          <p:nvPr/>
+        </p:nvSpPr>
+        <p:spPr>
+          <a:xfrm>
+            <a:off x="502920" y="1444752"/>
+            <a:ext cx="10424160" cy="457200"/>
+          </a:xfrm>
+          <a:prstGeom prst="rect">
+            <a:avLst/>
+          </a:prstGeom>
+          <a:noFill/>
+        </p:spPr>
+        <p:txBody>
+          <a:bodyPr wrap="square" lIns="0" rIns="0" tIns="0" bIns="0" anchor="t">
+            <a:spAutoFit/>
+          </a:bodyPr>
+          <a:lstStyle/>
+          <a:p>
+            <a:pPr algn="l">
+              <a:lnSpc>
+                <a:spcPct val="130000"/>
+              </a:lnSpc>
+            </a:pPr>
+            <a:r>
+              <a:rPr sz="1400" b="0">
+                <a:solidFill>
+                  <a:srgbClr val="58595B"/>
+                </a:solidFill>
+                <a:latin typeface="Arial"/>
+              </a:rPr>
+              <a:t>A boundary drawn around two management units blends two crops into one curve. We can detect that before reporting anything — and it predicts almost perfectly whether we get the crop right.</a:t>
+            </a:r>
+          </a:p>
+        </p:txBody>
+      </p:sp>
+      <p:sp>
+        <p:nvSpPr>
+          <p:cNvPr id="13" name="TextBox 12"/>
+          <p:cNvSpPr txBox="1"/>
+          <p:nvPr/>
+        </p:nvSpPr>
+        <p:spPr>
+          <a:xfrm>
+            <a:off x="502920" y="2240280"/>
+            <a:ext cx="2194560" cy="256032"/>
+          </a:xfrm>
+          <a:prstGeom prst="rect">
+            <a:avLst/>
+          </a:prstGeom>
+          <a:noFill/>
+        </p:spPr>
+        <p:txBody>
+          <a:bodyPr wrap="square" lIns="0" rIns="0" tIns="0" bIns="0" anchor="t">
+            <a:spAutoFit/>
+          </a:bodyPr>
+          <a:lstStyle/>
+          <a:p>
+            <a:pPr algn="l">
+              <a:lnSpc>
+                <a:spcPct val="120000"/>
+              </a:lnSpc>
+            </a:pPr>
+            <a:r>
+              <a:rPr sz="1200" b="0">
+                <a:solidFill>
+                  <a:srgbClr val="58595B"/>
+                </a:solidFill>
+                <a:latin typeface="Arial"/>
+              </a:rPr>
+              <a:t>Under 60% one crop</a:t>
+            </a:r>
+          </a:p>
+        </p:txBody>
+      </p:sp>
+      <p:sp>
+        <p:nvSpPr>
+          <p:cNvPr id="14" name="Rectangle 13"/>
+          <p:cNvSpPr/>
+          <p:nvPr/>
+        </p:nvSpPr>
+        <p:spPr>
+          <a:xfrm>
+            <a:off x="2788920" y="2148840"/>
+            <a:ext cx="837498" cy="429768"/>
+          </a:xfrm>
+          <a:prstGeom prst="rect">
+            <a:avLst/>
+          </a:prstGeom>
+          <a:solidFill>
+            <a:srgbClr val="462668"/>
+          </a:solidFill>
+          <a:ln>
+            <a:noFill/>
+          </a:ln>
+          <a:effectLst/>
+        </p:spPr>
+        <p:style>
+          <a:lnRef idx="1">
+            <a:schemeClr val="accent1"/>
+          </a:lnRef>
+          <a:fillRef idx="3">
+            <a:schemeClr val="accent1"/>
+          </a:fillRef>
+          <a:effectRef idx="2">
+            <a:schemeClr val="accent1"/>
+          </a:effectRef>
+          <a:fontRef idx="minor">
+            <a:schemeClr val="lt1"/>
+          </a:fontRef>
+        </p:style>
+        <p:txBody>
+          <a:bodyPr rtlCol="0" anchor="ctr"/>
+          <a:lstStyle/>
+          <a:p>
+            <a:pPr algn="ctr"/>
+          </a:p>
+        </p:txBody>
+      </p:sp>
+      <p:sp>
+        <p:nvSpPr>
+          <p:cNvPr id="15" name="TextBox 14"/>
+          <p:cNvSpPr txBox="1"/>
+          <p:nvPr/>
+        </p:nvSpPr>
+        <p:spPr>
+          <a:xfrm>
+            <a:off x="3763578" y="2185416"/>
+            <a:ext cx="914400" cy="301752"/>
+          </a:xfrm>
+          <a:prstGeom prst="rect">
+            <a:avLst/>
+          </a:prstGeom>
+          <a:noFill/>
+        </p:spPr>
+        <p:txBody>
+          <a:bodyPr wrap="square" lIns="0" rIns="0" tIns="0" bIns="0" anchor="t">
+            <a:spAutoFit/>
+          </a:bodyPr>
+          <a:lstStyle/>
+          <a:p>
+            <a:pPr algn="l">
+              <a:lnSpc>
+                <a:spcPct val="120000"/>
+              </a:lnSpc>
+            </a:pPr>
+            <a:r>
+              <a:rPr sz="1600" b="1">
+                <a:solidFill>
+                  <a:srgbClr val="212121"/>
+                </a:solidFill>
+                <a:latin typeface="Arial Narrow"/>
+              </a:rPr>
+              <a:t>12.9%</a:t>
+            </a:r>
+          </a:p>
+        </p:txBody>
+      </p:sp>
+      <p:sp>
+        <p:nvSpPr>
+          <p:cNvPr id="16" name="TextBox 15"/>
+          <p:cNvSpPr txBox="1"/>
+          <p:nvPr/>
+        </p:nvSpPr>
+        <p:spPr>
+          <a:xfrm>
+            <a:off x="4632258" y="2240280"/>
+            <a:ext cx="1005840" cy="256032"/>
+          </a:xfrm>
+          <a:prstGeom prst="rect">
+            <a:avLst/>
+          </a:prstGeom>
+          <a:noFill/>
+        </p:spPr>
+        <p:txBody>
+          <a:bodyPr wrap="square" lIns="0" rIns="0" tIns="0" bIns="0" anchor="t">
+            <a:spAutoFit/>
+          </a:bodyPr>
+          <a:lstStyle/>
+          <a:p>
+            <a:pPr algn="l">
+              <a:lnSpc>
+                <a:spcPct val="120000"/>
+              </a:lnSpc>
+            </a:pPr>
+            <a:r>
+              <a:rPr sz="1000" b="0">
+                <a:solidFill>
+                  <a:srgbClr val="58595B"/>
+                </a:solidFill>
+                <a:latin typeface="Arial"/>
+              </a:rPr>
+              <a:t>31 fields</a:t>
+            </a:r>
+          </a:p>
+        </p:txBody>
+      </p:sp>
+      <p:sp>
+        <p:nvSpPr>
+          <p:cNvPr id="17" name="TextBox 16"/>
+          <p:cNvSpPr txBox="1"/>
+          <p:nvPr/>
+        </p:nvSpPr>
+        <p:spPr>
+          <a:xfrm>
+            <a:off x="502920" y="2862072"/>
+            <a:ext cx="2194560" cy="256032"/>
+          </a:xfrm>
+          <a:prstGeom prst="rect">
+            <a:avLst/>
+          </a:prstGeom>
+          <a:noFill/>
+        </p:spPr>
+        <p:txBody>
+          <a:bodyPr wrap="square" lIns="0" rIns="0" tIns="0" bIns="0" anchor="t">
+            <a:spAutoFit/>
+          </a:bodyPr>
+          <a:lstStyle/>
+          <a:p>
+            <a:pPr algn="l">
+              <a:lnSpc>
+                <a:spcPct val="120000"/>
+              </a:lnSpc>
+            </a:pPr>
+            <a:r>
+              <a:rPr sz="1200" b="0">
+                <a:solidFill>
+                  <a:srgbClr val="58595B"/>
+                </a:solidFill>
+                <a:latin typeface="Arial"/>
+              </a:rPr>
+              <a:t>60–75% one crop</a:t>
+            </a:r>
+          </a:p>
+        </p:txBody>
+      </p:sp>
+      <p:sp>
+        <p:nvSpPr>
+          <p:cNvPr id="18" name="Rectangle 17"/>
+          <p:cNvSpPr/>
+          <p:nvPr/>
+        </p:nvSpPr>
+        <p:spPr>
+          <a:xfrm>
+            <a:off x="2788920" y="2770632"/>
+            <a:ext cx="4674412" cy="429768"/>
+          </a:xfrm>
+          <a:prstGeom prst="rect">
+            <a:avLst/>
+          </a:prstGeom>
+          <a:solidFill>
+            <a:srgbClr val="F46C09"/>
+          </a:solidFill>
+          <a:ln>
+            <a:noFill/>
+          </a:ln>
+          <a:effectLst/>
+        </p:spPr>
+        <p:style>
+          <a:lnRef idx="1">
+            <a:schemeClr val="accent1"/>
+          </a:lnRef>
+          <a:fillRef idx="3">
+            <a:schemeClr val="accent1"/>
+          </a:fillRef>
+          <a:effectRef idx="2">
+            <a:schemeClr val="accent1"/>
+          </a:effectRef>
+          <a:fontRef idx="minor">
+            <a:schemeClr val="lt1"/>
+          </a:fontRef>
+        </p:style>
+        <p:txBody>
+          <a:bodyPr rtlCol="0" anchor="ctr"/>
+          <a:lstStyle/>
+          <a:p>
+            <a:pPr algn="ctr"/>
+          </a:p>
+        </p:txBody>
+      </p:sp>
+      <p:sp>
+        <p:nvSpPr>
+          <p:cNvPr id="19" name="TextBox 18"/>
+          <p:cNvSpPr txBox="1"/>
+          <p:nvPr/>
+        </p:nvSpPr>
+        <p:spPr>
+          <a:xfrm>
+            <a:off x="7600492" y="2807208"/>
+            <a:ext cx="914400" cy="301752"/>
+          </a:xfrm>
+          <a:prstGeom prst="rect">
+            <a:avLst/>
+          </a:prstGeom>
+          <a:noFill/>
+        </p:spPr>
+        <p:txBody>
+          <a:bodyPr wrap="square" lIns="0" rIns="0" tIns="0" bIns="0" anchor="t">
+            <a:spAutoFit/>
+          </a:bodyPr>
+          <a:lstStyle/>
+          <a:p>
+            <a:pPr algn="l">
+              <a:lnSpc>
+                <a:spcPct val="120000"/>
+              </a:lnSpc>
+            </a:pPr>
+            <a:r>
+              <a:rPr sz="1600" b="1">
+                <a:solidFill>
+                  <a:srgbClr val="212121"/>
+                </a:solidFill>
+                <a:latin typeface="Arial Narrow"/>
+              </a:rPr>
+              <a:t>72.0%</a:t>
+            </a:r>
+          </a:p>
+        </p:txBody>
+      </p:sp>
+      <p:sp>
+        <p:nvSpPr>
+          <p:cNvPr id="20" name="TextBox 19"/>
+          <p:cNvSpPr txBox="1"/>
+          <p:nvPr/>
+        </p:nvSpPr>
+        <p:spPr>
+          <a:xfrm>
+            <a:off x="8469172" y="2862072"/>
+            <a:ext cx="1005840" cy="256032"/>
+          </a:xfrm>
+          <a:prstGeom prst="rect">
+            <a:avLst/>
+          </a:prstGeom>
+          <a:noFill/>
+        </p:spPr>
+        <p:txBody>
+          <a:bodyPr wrap="square" lIns="0" rIns="0" tIns="0" bIns="0" anchor="t">
+            <a:spAutoFit/>
+          </a:bodyPr>
+          <a:lstStyle/>
+          <a:p>
+            <a:pPr algn="l">
+              <a:lnSpc>
+                <a:spcPct val="120000"/>
+              </a:lnSpc>
+            </a:pPr>
+            <a:r>
+              <a:rPr sz="1000" b="0">
+                <a:solidFill>
+                  <a:srgbClr val="58595B"/>
+                </a:solidFill>
+                <a:latin typeface="Arial"/>
+              </a:rPr>
+              <a:t>25 fields</a:t>
+            </a:r>
+          </a:p>
+        </p:txBody>
+      </p:sp>
+      <p:sp>
+        <p:nvSpPr>
+          <p:cNvPr id="21" name="TextBox 20"/>
+          <p:cNvSpPr txBox="1"/>
+          <p:nvPr/>
+        </p:nvSpPr>
+        <p:spPr>
+          <a:xfrm>
+            <a:off x="502920" y="3483864"/>
+            <a:ext cx="2194560" cy="256032"/>
+          </a:xfrm>
+          <a:prstGeom prst="rect">
+            <a:avLst/>
+          </a:prstGeom>
+          <a:noFill/>
+        </p:spPr>
+        <p:txBody>
+          <a:bodyPr wrap="square" lIns="0" rIns="0" tIns="0" bIns="0" anchor="t">
+            <a:spAutoFit/>
+          </a:bodyPr>
+          <a:lstStyle/>
+          <a:p>
+            <a:pPr algn="l">
+              <a:lnSpc>
+                <a:spcPct val="120000"/>
+              </a:lnSpc>
+            </a:pPr>
+            <a:r>
+              <a:rPr sz="1200" b="0">
+                <a:solidFill>
+                  <a:srgbClr val="58595B"/>
+                </a:solidFill>
+                <a:latin typeface="Arial"/>
+              </a:rPr>
+              <a:t>75–90% one crop</a:t>
+            </a:r>
+          </a:p>
+        </p:txBody>
+      </p:sp>
+      <p:sp>
+        <p:nvSpPr>
+          <p:cNvPr id="22" name="Rectangle 21"/>
+          <p:cNvSpPr/>
+          <p:nvPr/>
+        </p:nvSpPr>
+        <p:spPr>
+          <a:xfrm>
+            <a:off x="2788920" y="3392424"/>
+            <a:ext cx="5843016" cy="429768"/>
+          </a:xfrm>
+          <a:prstGeom prst="rect">
+            <a:avLst/>
+          </a:prstGeom>
+          <a:solidFill>
+            <a:srgbClr val="10427C"/>
+          </a:solidFill>
+          <a:ln>
+            <a:noFill/>
+          </a:ln>
+          <a:effectLst/>
+        </p:spPr>
+        <p:style>
+          <a:lnRef idx="1">
+            <a:schemeClr val="accent1"/>
+          </a:lnRef>
+          <a:fillRef idx="3">
+            <a:schemeClr val="accent1"/>
+          </a:fillRef>
+          <a:effectRef idx="2">
+            <a:schemeClr val="accent1"/>
+          </a:effectRef>
+          <a:fontRef idx="minor">
+            <a:schemeClr val="lt1"/>
+          </a:fontRef>
+        </p:style>
+        <p:txBody>
+          <a:bodyPr rtlCol="0" anchor="ctr"/>
+          <a:lstStyle/>
+          <a:p>
+            <a:pPr algn="ctr"/>
+          </a:p>
+        </p:txBody>
+      </p:sp>
+      <p:sp>
+        <p:nvSpPr>
+          <p:cNvPr id="23" name="TextBox 22"/>
+          <p:cNvSpPr txBox="1"/>
+          <p:nvPr/>
+        </p:nvSpPr>
+        <p:spPr>
+          <a:xfrm>
+            <a:off x="8769096" y="3429000"/>
+            <a:ext cx="914400" cy="301752"/>
+          </a:xfrm>
+          <a:prstGeom prst="rect">
+            <a:avLst/>
+          </a:prstGeom>
+          <a:noFill/>
+        </p:spPr>
+        <p:txBody>
+          <a:bodyPr wrap="square" lIns="0" rIns="0" tIns="0" bIns="0" anchor="t">
+            <a:spAutoFit/>
+          </a:bodyPr>
+          <a:lstStyle/>
+          <a:p>
+            <a:pPr algn="l">
+              <a:lnSpc>
+                <a:spcPct val="120000"/>
+              </a:lnSpc>
+            </a:pPr>
+            <a:r>
+              <a:rPr sz="1600" b="1">
+                <a:solidFill>
+                  <a:srgbClr val="212121"/>
+                </a:solidFill>
+                <a:latin typeface="Arial Narrow"/>
+              </a:rPr>
+              <a:t>90.0%</a:t>
+            </a:r>
+          </a:p>
+        </p:txBody>
+      </p:sp>
+      <p:sp>
+        <p:nvSpPr>
+          <p:cNvPr id="24" name="TextBox 23"/>
+          <p:cNvSpPr txBox="1"/>
+          <p:nvPr/>
+        </p:nvSpPr>
+        <p:spPr>
+          <a:xfrm>
+            <a:off x="9637776" y="3483864"/>
+            <a:ext cx="1005840" cy="256032"/>
+          </a:xfrm>
+          <a:prstGeom prst="rect">
+            <a:avLst/>
+          </a:prstGeom>
+          <a:noFill/>
+        </p:spPr>
+        <p:txBody>
+          <a:bodyPr wrap="square" lIns="0" rIns="0" tIns="0" bIns="0" anchor="t">
+            <a:spAutoFit/>
+          </a:bodyPr>
+          <a:lstStyle/>
+          <a:p>
+            <a:pPr algn="l">
+              <a:lnSpc>
+                <a:spcPct val="120000"/>
+              </a:lnSpc>
+            </a:pPr>
+            <a:r>
+              <a:rPr sz="1000" b="0">
+                <a:solidFill>
+                  <a:srgbClr val="58595B"/>
+                </a:solidFill>
+                <a:latin typeface="Arial"/>
+              </a:rPr>
+              <a:t>90 fields</a:t>
+            </a:r>
+          </a:p>
+        </p:txBody>
+      </p:sp>
+      <p:sp>
+        <p:nvSpPr>
+          <p:cNvPr id="25" name="TextBox 24"/>
+          <p:cNvSpPr txBox="1"/>
+          <p:nvPr/>
+        </p:nvSpPr>
+        <p:spPr>
+          <a:xfrm>
+            <a:off x="502920" y="4105656"/>
+            <a:ext cx="2194560" cy="256032"/>
+          </a:xfrm>
+          <a:prstGeom prst="rect">
+            <a:avLst/>
+          </a:prstGeom>
+          <a:noFill/>
+        </p:spPr>
+        <p:txBody>
+          <a:bodyPr wrap="square" lIns="0" rIns="0" tIns="0" bIns="0" anchor="t">
+            <a:spAutoFit/>
+          </a:bodyPr>
+          <a:lstStyle/>
+          <a:p>
+            <a:pPr algn="l">
+              <a:lnSpc>
+                <a:spcPct val="120000"/>
+              </a:lnSpc>
+            </a:pPr>
+            <a:r>
+              <a:rPr sz="1200" b="0">
+                <a:solidFill>
+                  <a:srgbClr val="58595B"/>
+                </a:solidFill>
+                <a:latin typeface="Arial"/>
+              </a:rPr>
+              <a:t>Over 90% one crop</a:t>
+            </a:r>
+          </a:p>
+        </p:txBody>
+      </p:sp>
+      <p:sp>
+        <p:nvSpPr>
+          <p:cNvPr id="26" name="Rectangle 25"/>
+          <p:cNvSpPr/>
+          <p:nvPr/>
+        </p:nvSpPr>
+        <p:spPr>
+          <a:xfrm>
+            <a:off x="2788920" y="4014216"/>
+            <a:ext cx="5719663" cy="429768"/>
+          </a:xfrm>
+          <a:prstGeom prst="rect">
+            <a:avLst/>
+          </a:prstGeom>
+          <a:solidFill>
+            <a:srgbClr val="10427C"/>
+          </a:solidFill>
+          <a:ln>
+            <a:noFill/>
+          </a:ln>
+          <a:effectLst/>
+        </p:spPr>
+        <p:style>
+          <a:lnRef idx="1">
+            <a:schemeClr val="accent1"/>
+          </a:lnRef>
+          <a:fillRef idx="3">
+            <a:schemeClr val="accent1"/>
+          </a:fillRef>
+          <a:effectRef idx="2">
+            <a:schemeClr val="accent1"/>
+          </a:effectRef>
+          <a:fontRef idx="minor">
+            <a:schemeClr val="lt1"/>
+          </a:fontRef>
+        </p:style>
+        <p:txBody>
+          <a:bodyPr rtlCol="0" anchor="ctr"/>
+          <a:lstStyle/>
+          <a:p>
+            <a:pPr algn="ctr"/>
+          </a:p>
+        </p:txBody>
+      </p:sp>
+      <p:sp>
+        <p:nvSpPr>
+          <p:cNvPr id="27" name="TextBox 26"/>
+          <p:cNvSpPr txBox="1"/>
+          <p:nvPr/>
+        </p:nvSpPr>
+        <p:spPr>
+          <a:xfrm>
+            <a:off x="8645743" y="4050792"/>
+            <a:ext cx="914400" cy="301752"/>
+          </a:xfrm>
+          <a:prstGeom prst="rect">
+            <a:avLst/>
+          </a:prstGeom>
+          <a:noFill/>
+        </p:spPr>
+        <p:txBody>
+          <a:bodyPr wrap="square" lIns="0" rIns="0" tIns="0" bIns="0" anchor="t">
+            <a:spAutoFit/>
+          </a:bodyPr>
+          <a:lstStyle/>
+          <a:p>
+            <a:pPr algn="l">
+              <a:lnSpc>
+                <a:spcPct val="120000"/>
+              </a:lnSpc>
+            </a:pPr>
+            <a:r>
+              <a:rPr sz="1600" b="1">
+                <a:solidFill>
+                  <a:srgbClr val="212121"/>
+                </a:solidFill>
+                <a:latin typeface="Arial Narrow"/>
+              </a:rPr>
+              <a:t>88.1%</a:t>
+            </a:r>
+          </a:p>
+        </p:txBody>
+      </p:sp>
+      <p:sp>
+        <p:nvSpPr>
+          <p:cNvPr id="28" name="TextBox 27"/>
+          <p:cNvSpPr txBox="1"/>
+          <p:nvPr/>
+        </p:nvSpPr>
+        <p:spPr>
+          <a:xfrm>
+            <a:off x="9514423" y="4105656"/>
+            <a:ext cx="1005840" cy="256032"/>
+          </a:xfrm>
+          <a:prstGeom prst="rect">
+            <a:avLst/>
+          </a:prstGeom>
+          <a:noFill/>
+        </p:spPr>
+        <p:txBody>
+          <a:bodyPr wrap="square" lIns="0" rIns="0" tIns="0" bIns="0" anchor="t">
+            <a:spAutoFit/>
+          </a:bodyPr>
+          <a:lstStyle/>
+          <a:p>
+            <a:pPr algn="l">
+              <a:lnSpc>
+                <a:spcPct val="120000"/>
+              </a:lnSpc>
+            </a:pPr>
+            <a:r>
+              <a:rPr sz="1000" b="0">
+                <a:solidFill>
+                  <a:srgbClr val="58595B"/>
+                </a:solidFill>
+                <a:latin typeface="Arial"/>
+              </a:rPr>
+              <a:t>201 fields</a:t>
+            </a:r>
+          </a:p>
+        </p:txBody>
+      </p:sp>
+      <p:sp>
+        <p:nvSpPr>
+          <p:cNvPr id="29" name="TextBox 28"/>
+          <p:cNvSpPr txBox="1"/>
+          <p:nvPr/>
+        </p:nvSpPr>
+        <p:spPr>
+          <a:xfrm>
+            <a:off x="502920" y="4846320"/>
+            <a:ext cx="10698480" cy="731520"/>
+          </a:xfrm>
+          <a:prstGeom prst="rect">
+            <a:avLst/>
+          </a:prstGeom>
+          <a:noFill/>
+        </p:spPr>
+        <p:txBody>
+          <a:bodyPr wrap="square" lIns="0" rIns="0" tIns="0" bIns="0" anchor="t">
+            <a:spAutoFit/>
+          </a:bodyPr>
+          <a:lstStyle/>
+          <a:p>
+            <a:pPr algn="l">
+              <a:lnSpc>
+                <a:spcPct val="130000"/>
+              </a:lnSpc>
+            </a:pPr>
+            <a:r>
+              <a:rPr sz="1400" b="1">
+                <a:solidFill>
+                  <a:srgbClr val="58595B"/>
+                </a:solidFill>
+                <a:latin typeface="Arial"/>
+              </a:rPr>
+              <a:t>This is free quality control. </a:t>
+            </a:r>
+            <a:r>
+              <a:rPr sz="1400" b="0">
+                <a:solidFill>
+                  <a:srgbClr val="58595B"/>
+                </a:solidFill>
+                <a:latin typeface="Arial"/>
+              </a:rPr>
+              <a:t>Refusing to score the worst 16% of boundaries lifts crop accuracy from 80.7% to 88.7% and costs nothing but an honest “we cannot read this field”.</a:t>
+            </a:r>
+          </a:p>
+        </p:txBody>
+      </p:sp>
+      <p:sp>
+        <p:nvSpPr>
+          <p:cNvPr id="30" name="TextBox 29"/>
+          <p:cNvSpPr txBox="1"/>
+          <p:nvPr/>
+        </p:nvSpPr>
+        <p:spPr>
+          <a:xfrm>
+            <a:off x="502920" y="6199632"/>
+            <a:ext cx="11185855" cy="256032"/>
+          </a:xfrm>
+          <a:prstGeom prst="rect">
+            <a:avLst/>
+          </a:prstGeom>
+          <a:noFill/>
+        </p:spPr>
+        <p:txBody>
+          <a:bodyPr wrap="square" lIns="0" rIns="0" tIns="0" bIns="0" anchor="t">
+            <a:spAutoFit/>
+          </a:bodyPr>
+          <a:lstStyle/>
+          <a:p>
+            <a:pPr algn="l">
+              <a:lnSpc>
+                <a:spcPct val="120000"/>
+              </a:lnSpc>
+            </a:pPr>
+            <a:r>
+              <a:rPr sz="900" b="0">
+                <a:solidFill>
+                  <a:srgbClr val="58595B"/>
+                </a:solidFill>
+                <a:latin typeface="Arial"/>
+              </a:rPr>
+              <a:t>Agreement with grower-reported crop, by share of the boundary CDL assigns to a single class. All 347 field-years.</a:t>
+            </a:r>
+          </a:p>
+        </p:txBody>
+      </p:sp>
+    </p:spTree>
+  </p:cSld>
+  <p:clrMapOvr>
+    <a:masterClrMapping/>
+  </p:clrMapOvr>
+</p:sld>
+</file>
+
+<file path=ppt/slides/slide13.xml><?xml version="1.0" encoding="utf-8"?>
+<p:sld xmlns:a="http://schemas.openxmlformats.org/drawingml/2006/main" xmlns:p="http://schemas.openxmlformats.org/presentationml/2006/main" xmlns:r="http://schemas.openxmlformats.org/officeDocument/2006/relationships">
+  <p:cSld>
+    <p:spTree>
+      <p:nvGrpSpPr>
+        <p:cNvPr id="1" name=""/>
+        <p:cNvGrpSpPr/>
+        <p:nvPr/>
+      </p:nvGrpSpPr>
+      <p:grpSpPr/>
+      <p:sp>
+        <p:nvSpPr>
+          <p:cNvPr id="2" name="Rectangle 1"/>
+          <p:cNvSpPr/>
+          <p:nvPr/>
+        </p:nvSpPr>
+        <p:spPr>
+          <a:xfrm>
+            <a:off x="0" y="0"/>
+            <a:ext cx="12191695" cy="6858000"/>
+          </a:xfrm>
+          <a:prstGeom prst="rect">
+            <a:avLst/>
+          </a:prstGeom>
+          <a:solidFill>
+            <a:srgbClr val="FFFFFF"/>
+          </a:solidFill>
+          <a:ln>
+            <a:noFill/>
+          </a:ln>
+          <a:effectLst/>
+        </p:spPr>
+        <p:style>
+          <a:lnRef idx="1">
+            <a:schemeClr val="accent1"/>
+          </a:lnRef>
+          <a:fillRef idx="3">
+            <a:schemeClr val="accent1"/>
+          </a:fillRef>
+          <a:effectRef idx="2">
+            <a:schemeClr val="accent1"/>
+          </a:effectRef>
+          <a:fontRef idx="minor">
+            <a:schemeClr val="lt1"/>
+          </a:fontRef>
+        </p:style>
+        <p:txBody>
+          <a:bodyPr rtlCol="0" anchor="ctr"/>
+          <a:lstStyle/>
+          <a:p>
+            <a:pPr algn="ctr"/>
+          </a:p>
+        </p:txBody>
+      </p:sp>
+      <p:sp>
+        <p:nvSpPr>
+          <p:cNvPr id="3" name="Rectangle 2"/>
+          <p:cNvSpPr/>
+          <p:nvPr/>
+        </p:nvSpPr>
+        <p:spPr>
+          <a:xfrm>
+            <a:off x="0" y="0"/>
+            <a:ext cx="12191695" cy="1143000"/>
+          </a:xfrm>
+          <a:prstGeom prst="rect">
+            <a:avLst/>
+          </a:prstGeom>
+          <a:solidFill>
+            <a:srgbClr val="10427C"/>
+          </a:solidFill>
+          <a:ln>
+            <a:noFill/>
+          </a:ln>
+          <a:effectLst/>
+        </p:spPr>
+        <p:style>
+          <a:lnRef idx="1">
+            <a:schemeClr val="accent1"/>
+          </a:lnRef>
+          <a:fillRef idx="3">
+            <a:schemeClr val="accent1"/>
+          </a:fillRef>
+          <a:effectRef idx="2">
+            <a:schemeClr val="accent1"/>
+          </a:effectRef>
+          <a:fontRef idx="minor">
+            <a:schemeClr val="lt1"/>
+          </a:fontRef>
+        </p:style>
+        <p:txBody>
+          <a:bodyPr rtlCol="0" anchor="ctr"/>
+          <a:lstStyle/>
+          <a:p>
+            <a:pPr algn="ctr"/>
+          </a:p>
+        </p:txBody>
+      </p:sp>
+      <p:sp>
+        <p:nvSpPr>
+          <p:cNvPr id="4" name="TextBox 3"/>
+          <p:cNvSpPr txBox="1"/>
+          <p:nvPr/>
+        </p:nvSpPr>
+        <p:spPr>
+          <a:xfrm>
+            <a:off x="502920" y="329184"/>
+            <a:ext cx="9174175" cy="566928"/>
+          </a:xfrm>
+          <a:prstGeom prst="rect">
+            <a:avLst/>
+          </a:prstGeom>
+          <a:noFill/>
+        </p:spPr>
+        <p:txBody>
+          <a:bodyPr wrap="square" lIns="0" rIns="0" tIns="0" bIns="0" anchor="t">
+            <a:spAutoFit/>
+          </a:bodyPr>
+          <a:lstStyle/>
+          <a:p>
+            <a:pPr algn="l">
+              <a:lnSpc>
+                <a:spcPct val="100000"/>
+              </a:lnSpc>
+            </a:pPr>
+            <a:r>
+              <a:rPr sz="2700" b="1">
+                <a:solidFill>
+                  <a:srgbClr val="FFFFFF"/>
+                </a:solidFill>
+                <a:latin typeface="Arial Narrow"/>
+              </a:rPr>
               <a:t>What an uncalibrated threshold costs</a:t>
             </a:r>
           </a:p>
@@ -7290,7 +9527,7 @@
 </p:sld>
 </file>
 
-<file path=ppt/slides/slide12.xml><?xml version="1.0" encoding="utf-8"?>
+<file path=ppt/slides/slide14.xml><?xml version="1.0" encoding="utf-8"?>
 <p:sld xmlns:a="http://schemas.openxmlformats.org/drawingml/2006/main" xmlns:p="http://schemas.openxmlformats.org/presentationml/2006/main" xmlns:r="http://schemas.openxmlformats.org/officeDocument/2006/relationships">
   <p:cSld>
     <p:spTree>
@@ -8299,7 +10536,7 @@
 </p:sld>
 </file>
 
-<file path=ppt/slides/slide13.xml><?xml version="1.0" encoding="utf-8"?>
+<file path=ppt/slides/slide15.xml><?xml version="1.0" encoding="utf-8"?>
 <p:sld xmlns:a="http://schemas.openxmlformats.org/drawingml/2006/main" xmlns:p="http://schemas.openxmlformats.org/presentationml/2006/main" xmlns:r="http://schemas.openxmlformats.org/officeDocument/2006/relationships">
   <p:cSld>
     <p:spTree>
@@ -9192,7 +11429,7 @@
 </p:sld>
 </file>
 
-<file path=ppt/slides/slide14.xml><?xml version="1.0" encoding="utf-8"?>
+<file path=ppt/slides/slide16.xml><?xml version="1.0" encoding="utf-8"?>
 <p:sld xmlns:a="http://schemas.openxmlformats.org/drawingml/2006/main" xmlns:p="http://schemas.openxmlformats.org/presentationml/2006/main" xmlns:r="http://schemas.openxmlformats.org/officeDocument/2006/relationships">
   <p:cSld>
     <p:spTree>
@@ -10408,7 +12645,7 @@
 </p:sld>
 </file>
 
-<file path=ppt/slides/slide15.xml><?xml version="1.0" encoding="utf-8"?>
+<file path=ppt/slides/slide17.xml><?xml version="1.0" encoding="utf-8"?>
 <p:sld xmlns:a="http://schemas.openxmlformats.org/drawingml/2006/main" xmlns:p="http://schemas.openxmlformats.org/presentationml/2006/main" xmlns:r="http://schemas.openxmlformats.org/officeDocument/2006/relationships">
   <p:cSld>
     <p:spTree>
@@ -11151,7 +13388,7 @@
 </p:sld>
 </file>
 
-<file path=ppt/slides/slide16.xml><?xml version="1.0" encoding="utf-8"?>
+<file path=ppt/slides/slide18.xml><?xml version="1.0" encoding="utf-8"?>
 <p:sld xmlns:a="http://schemas.openxmlformats.org/drawingml/2006/main" xmlns:p="http://schemas.openxmlformats.org/presentationml/2006/main" xmlns:r="http://schemas.openxmlformats.org/officeDocument/2006/relationships">
   <p:cSld>
     <p:spTree>
@@ -18283,7 +20520,7 @@
                 </a:solidFill>
                 <a:latin typeface="Arial"/>
               </a:rPr>
-              <a:t>through the spring as a conventionally tilled one. Slide 12 explains what is really driving that gap.</a:t>
+              <a:t>through the spring as a conventionally tilled one. "What the gap is really made of" explains what is driving that.</a:t>
             </a:r>
           </a:p>
         </p:txBody>
@@ -18360,7 +20597,7 @@
             <a:avLst/>
           </a:prstGeom>
           <a:solidFill>
-            <a:srgbClr val="10427C"/>
+            <a:srgbClr val="FFFFFF"/>
           </a:solidFill>
           <a:ln>
             <a:noFill/>
@@ -18397,8 +20634,8 @@
         </p:nvSpPr>
         <p:spPr>
           <a:xfrm>
-            <a:off x="0" y="6510528"/>
-            <a:ext cx="4880335" cy="347472"/>
+            <a:off x="0" y="0"/>
+            <a:ext cx="12191695" cy="1143000"/>
           </a:xfrm>
           <a:prstGeom prst="rect">
             <a:avLst/>
@@ -18435,7 +20672,114 @@
       </p:sp>
       <p:sp>
         <p:nvSpPr>
-          <p:cNvPr id="4" name="Rectangle 3"/>
+          <p:cNvPr id="4" name="TextBox 3"/>
+          <p:cNvSpPr txBox="1"/>
+          <p:nvPr/>
+        </p:nvSpPr>
+        <p:spPr>
+          <a:xfrm>
+            <a:off x="502920" y="329184"/>
+            <a:ext cx="9174175" cy="566928"/>
+          </a:xfrm>
+          <a:prstGeom prst="rect">
+            <a:avLst/>
+          </a:prstGeom>
+          <a:noFill/>
+        </p:spPr>
+        <p:txBody>
+          <a:bodyPr wrap="square" lIns="0" rIns="0" tIns="0" bIns="0" anchor="t">
+            <a:spAutoFit/>
+          </a:bodyPr>
+          <a:lstStyle/>
+          <a:p>
+            <a:pPr algn="l">
+              <a:lnSpc>
+                <a:spcPct val="100000"/>
+              </a:lnSpc>
+            </a:pPr>
+            <a:r>
+              <a:rPr sz="2700" b="1">
+                <a:solidFill>
+                  <a:srgbClr val="FFFFFF"/>
+                </a:solidFill>
+                <a:latin typeface="Arial Narrow"/>
+              </a:rPr>
+              <a:t>Every field around it, read the same way</a:t>
+            </a:r>
+          </a:p>
+        </p:txBody>
+      </p:sp>
+      <p:pic>
+        <p:nvPicPr>
+          <p:cNvPr id="5" name="Picture 4" descr="FTM-H_rgb.png"/>
+          <p:cNvPicPr>
+            <a:picLocks noChangeAspect="1"/>
+          </p:cNvPicPr>
+          <p:nvPr/>
+        </p:nvPicPr>
+        <p:blipFill>
+          <a:blip r:embed="rId2"/>
+          <a:stretch>
+            <a:fillRect/>
+          </a:stretch>
+        </p:blipFill>
+        <p:spPr>
+          <a:xfrm>
+            <a:off x="9585655" y="274320"/>
+            <a:ext cx="2103120" cy="642850"/>
+          </a:xfrm>
+          <a:prstGeom prst="rect">
+            <a:avLst/>
+          </a:prstGeom>
+        </p:spPr>
+      </p:pic>
+      <p:sp>
+        <p:nvSpPr>
+          <p:cNvPr id="6" name="Rectangle 5"/>
+          <p:cNvSpPr/>
+          <p:nvPr/>
+        </p:nvSpPr>
+        <p:spPr>
+          <a:xfrm>
+            <a:off x="0" y="6510528"/>
+            <a:ext cx="4880335" cy="347472"/>
+          </a:xfrm>
+          <a:prstGeom prst="rect">
+            <a:avLst/>
+          </a:prstGeom>
+          <a:solidFill>
+            <a:srgbClr val="10427C"/>
+          </a:solidFill>
+          <a:ln>
+            <a:noFill/>
+          </a:ln>
+          <a:effectLst/>
+        </p:spPr>
+        <p:style>
+          <a:lnRef idx="1">
+            <a:schemeClr val="accent1"/>
+          </a:lnRef>
+          <a:fillRef idx="3">
+            <a:schemeClr val="accent1"/>
+          </a:fillRef>
+          <a:effectRef idx="2">
+            <a:schemeClr val="accent1"/>
+          </a:effectRef>
+          <a:fontRef idx="minor">
+            <a:schemeClr val="lt1"/>
+          </a:fontRef>
+        </p:style>
+        <p:txBody>
+          <a:bodyPr rtlCol="0" anchor="ctr"/>
+          <a:lstStyle/>
+          <a:p>
+            <a:pPr algn="ctr"/>
+          </a:p>
+        </p:txBody>
+      </p:sp>
+      <p:sp>
+        <p:nvSpPr>
+          <p:cNvPr id="7" name="Rectangle 6"/>
           <p:cNvSpPr/>
           <p:nvPr/>
         </p:nvSpPr>
@@ -18479,7 +20823,7 @@
       </p:sp>
       <p:sp>
         <p:nvSpPr>
-          <p:cNvPr id="5" name="Rectangle 4"/>
+          <p:cNvPr id="8" name="Rectangle 7"/>
           <p:cNvSpPr/>
           <p:nvPr/>
         </p:nvSpPr>
@@ -18523,7 +20867,7 @@
       </p:sp>
       <p:sp>
         <p:nvSpPr>
-          <p:cNvPr id="6" name="Rectangle 5"/>
+          <p:cNvPr id="9" name="Rectangle 8"/>
           <p:cNvSpPr/>
           <p:nvPr/>
         </p:nvSpPr>
@@ -18567,7 +20911,7 @@
       </p:sp>
       <p:sp>
         <p:nvSpPr>
-          <p:cNvPr id="7" name="Rectangle 6"/>
+          <p:cNvPr id="10" name="Rectangle 9"/>
           <p:cNvSpPr/>
           <p:nvPr/>
         </p:nvSpPr>
@@ -18611,7 +20955,7 @@
       </p:sp>
       <p:sp>
         <p:nvSpPr>
-          <p:cNvPr id="8" name="Rectangle 7"/>
+          <p:cNvPr id="11" name="Rectangle 10"/>
           <p:cNvSpPr/>
           <p:nvPr/>
         </p:nvSpPr>
@@ -18653,16 +20997,40 @@
           </a:p>
         </p:txBody>
       </p:sp>
-      <p:sp>
-        <p:nvSpPr>
-          <p:cNvPr id="9" name="TextBox 8"/>
+      <p:pic>
+        <p:nvPicPr>
+          <p:cNvPr id="12" name="Picture 11" descr="01_cohort_map.png"/>
+          <p:cNvPicPr>
+            <a:picLocks noChangeAspect="1"/>
+          </p:cNvPicPr>
+          <p:nvPr/>
+        </p:nvPicPr>
+        <p:blipFill>
+          <a:blip r:embed="rId3"/>
+          <a:stretch>
+            <a:fillRect/>
+          </a:stretch>
+        </p:blipFill>
+        <p:spPr>
+          <a:xfrm>
+            <a:off x="502920" y="1481328"/>
+            <a:ext cx="5003817" cy="4617720"/>
+          </a:xfrm>
+          <a:prstGeom prst="rect">
+            <a:avLst/>
+          </a:prstGeom>
+        </p:spPr>
+      </p:pic>
+      <p:sp>
+        <p:nvSpPr>
+          <p:cNvPr id="13" name="TextBox 12"/>
           <p:cNvSpPr txBox="1"/>
           <p:nvPr/>
         </p:nvSpPr>
         <p:spPr>
           <a:xfrm>
-            <a:off x="502920" y="685800"/>
-            <a:ext cx="10881360" cy="594360"/>
+            <a:off x="5920008" y="1554480"/>
+            <a:ext cx="5768766" cy="310896"/>
           </a:xfrm>
           <a:prstGeom prst="rect">
             <a:avLst/>
@@ -18681,71 +21049,105 @@
               </a:lnSpc>
             </a:pPr>
             <a:r>
-              <a:rPr sz="3400" b="1">
+              <a:rPr sz="1700" b="1">
                 <a:solidFill>
-                  <a:srgbClr val="FFFFFF"/>
+                  <a:srgbClr val="212121"/>
                 </a:solidFill>
                 <a:latin typeface="Arial Narrow"/>
               </a:rPr>
-              <a:t>Then we checked it against farmers</a:t>
-            </a:r>
-          </a:p>
-        </p:txBody>
-      </p:sp>
-      <p:sp>
-        <p:nvSpPr>
-          <p:cNvPr id="10" name="Rectangle 9"/>
-          <p:cNvSpPr/>
-          <p:nvPr/>
-        </p:nvSpPr>
-        <p:spPr>
-          <a:xfrm>
-            <a:off x="502920" y="1417320"/>
-            <a:ext cx="2011680" cy="50292"/>
-          </a:xfrm>
-          <a:prstGeom prst="rect">
-            <a:avLst/>
-          </a:prstGeom>
-          <a:solidFill>
-            <a:srgbClr val="F46C09"/>
-          </a:solidFill>
-          <a:ln>
-            <a:noFill/>
-          </a:ln>
-          <a:effectLst/>
-        </p:spPr>
-        <p:style>
-          <a:lnRef idx="1">
-            <a:schemeClr val="accent1"/>
-          </a:lnRef>
-          <a:fillRef idx="3">
-            <a:schemeClr val="accent1"/>
-          </a:fillRef>
-          <a:effectRef idx="2">
-            <a:schemeClr val="accent1"/>
-          </a:effectRef>
-          <a:fontRef idx="minor">
-            <a:schemeClr val="lt1"/>
-          </a:fontRef>
-        </p:style>
-        <p:txBody>
-          <a:bodyPr rtlCol="0" anchor="ctr"/>
-          <a:lstStyle/>
-          <a:p>
-            <a:pPr algn="ctr"/>
-          </a:p>
-        </p:txBody>
-      </p:sp>
-      <p:sp>
-        <p:nvSpPr>
-          <p:cNvPr id="11" name="TextBox 10"/>
+              <a:t>Mitchell County, Georgia</a:t>
+            </a:r>
+          </a:p>
+        </p:txBody>
+      </p:sp>
+      <p:sp>
+        <p:nvSpPr>
+          <p:cNvPr id="14" name="TextBox 13"/>
           <p:cNvSpPr txBox="1"/>
           <p:nvPr/>
         </p:nvSpPr>
         <p:spPr>
           <a:xfrm>
-            <a:off x="502920" y="1737360"/>
-            <a:ext cx="10515600" cy="685800"/>
+            <a:off x="5920008" y="1956816"/>
+            <a:ext cx="5768766" cy="822960"/>
+          </a:xfrm>
+          <a:prstGeom prst="rect">
+            <a:avLst/>
+          </a:prstGeom>
+          <a:noFill/>
+        </p:spPr>
+        <p:txBody>
+          <a:bodyPr wrap="square" lIns="0" rIns="0" tIns="0" bIns="0" anchor="t">
+            <a:spAutoFit/>
+          </a:bodyPr>
+          <a:lstStyle/>
+          <a:p>
+            <a:pPr algn="l">
+              <a:lnSpc>
+                <a:spcPct val="135000"/>
+              </a:lnSpc>
+            </a:pPr>
+            <a:r>
+              <a:rPr sz="1300" b="0">
+                <a:solidFill>
+                  <a:srgbClr val="58595B"/>
+                </a:solidFill>
+                <a:latin typeface="Arial"/>
+              </a:rPr>
+              <a:t>Fifty qualifying cropland fields inside 3.9 km of one focus field, on 0.6 m aerial imagery. Almost every one is a centre pivot.</a:t>
+            </a:r>
+          </a:p>
+        </p:txBody>
+      </p:sp>
+      <p:sp>
+        <p:nvSpPr>
+          <p:cNvPr id="15" name="TextBox 14"/>
+          <p:cNvSpPr txBox="1"/>
+          <p:nvPr/>
+        </p:nvSpPr>
+        <p:spPr>
+          <a:xfrm>
+            <a:off x="5920008" y="2944368"/>
+            <a:ext cx="5768766" cy="256032"/>
+          </a:xfrm>
+          <a:prstGeom prst="rect">
+            <a:avLst/>
+          </a:prstGeom>
+          <a:noFill/>
+        </p:spPr>
+        <p:txBody>
+          <a:bodyPr wrap="square" lIns="0" rIns="0" tIns="0" bIns="0" anchor="t">
+            <a:spAutoFit/>
+          </a:bodyPr>
+          <a:lstStyle/>
+          <a:p>
+            <a:pPr algn="l">
+              <a:lnSpc>
+                <a:spcPct val="120000"/>
+              </a:lnSpc>
+            </a:pPr>
+            <a:r>
+              <a:rPr sz="1300" b="1">
+                <a:solidFill>
+                  <a:srgbClr val="10427C"/>
+                </a:solidFill>
+                <a:latin typeface="Arial Narrow"/>
+              </a:rPr>
+              <a:t>The white outlines</a:t>
+            </a:r>
+          </a:p>
+        </p:txBody>
+      </p:sp>
+      <p:sp>
+        <p:nvSpPr>
+          <p:cNvPr id="16" name="TextBox 15"/>
+          <p:cNvSpPr txBox="1"/>
+          <p:nvPr/>
+        </p:nvSpPr>
+        <p:spPr>
+          <a:xfrm>
+            <a:off x="5920008" y="3218688"/>
+            <a:ext cx="5768766" cy="676656"/>
           </a:xfrm>
           <a:prstGeom prst="rect">
             <a:avLst/>
@@ -18764,75 +21166,27 @@
               </a:lnSpc>
             </a:pPr>
             <a:r>
-              <a:rPr sz="1500" b="0">
+              <a:rPr sz="1150" b="0">
                 <a:solidFill>
-                  <a:srgbClr val="D6E0EC"/>
+                  <a:srgbClr val="58595B"/>
                 </a:solidFill>
                 <a:latin typeface="Arial"/>
               </a:rPr>
-              <a:t>A University of Georgia grower survey gave us boundaries, crop, tillage class, cover crop and irrigation, field by field and year by year. It is the first time any of this was tested against something a farmer said.</a:t>
-            </a:r>
-          </a:p>
-        </p:txBody>
-      </p:sp>
-      <p:sp>
-        <p:nvSpPr>
-          <p:cNvPr id="12" name="Rounded Rectangle 11"/>
-          <p:cNvSpPr/>
-          <p:nvPr/>
-        </p:nvSpPr>
-        <p:spPr>
-          <a:xfrm>
-            <a:off x="502920" y="2880360"/>
-            <a:ext cx="2624328" cy="1371600"/>
-          </a:xfrm>
-          <a:prstGeom prst="roundRect">
-            <a:avLst>
-              <a:gd name="adj" fmla="val 5000"/>
-            </a:avLst>
-          </a:prstGeom>
-          <a:solidFill>
-            <a:srgbClr val="1B5596"/>
-          </a:solidFill>
-          <a:ln w="12700">
-            <a:solidFill>
-              <a:srgbClr val="1B5596"/>
-            </a:solidFill>
-          </a:ln>
-          <a:effectLst/>
-        </p:spPr>
-        <p:style>
-          <a:lnRef idx="1">
-            <a:schemeClr val="accent1"/>
-          </a:lnRef>
-          <a:fillRef idx="3">
-            <a:schemeClr val="accent1"/>
-          </a:fillRef>
-          <a:effectRef idx="2">
-            <a:schemeClr val="accent1"/>
-          </a:effectRef>
-          <a:fontRef idx="minor">
-            <a:schemeClr val="lt1"/>
-          </a:fontRef>
-        </p:style>
-        <p:txBody>
-          <a:bodyPr rtlCol="0" anchor="ctr"/>
-          <a:lstStyle/>
-          <a:p>
-            <a:pPr algn="ctr"/>
-          </a:p>
-        </p:txBody>
-      </p:sp>
-      <p:sp>
-        <p:nvSpPr>
-          <p:cNvPr id="13" name="TextBox 12"/>
+              <a:t>Boundaries from the public USDA Common Land Unit. Nobody drew these and no grower supplied them.</a:t>
+            </a:r>
+          </a:p>
+        </p:txBody>
+      </p:sp>
+      <p:sp>
+        <p:nvSpPr>
+          <p:cNvPr id="17" name="TextBox 16"/>
           <p:cNvSpPr txBox="1"/>
           <p:nvPr/>
         </p:nvSpPr>
         <p:spPr>
           <a:xfrm>
-            <a:off x="777240" y="3063240"/>
-            <a:ext cx="2194560" cy="603504"/>
+            <a:off x="5920008" y="3968496"/>
+            <a:ext cx="5768766" cy="256032"/>
           </a:xfrm>
           <a:prstGeom prst="rect">
             <a:avLst/>
@@ -18851,27 +21205,66 @@
               </a:lnSpc>
             </a:pPr>
             <a:r>
-              <a:rPr sz="3400" b="1">
+              <a:rPr sz="1300" b="1">
                 <a:solidFill>
-                  <a:srgbClr val="FFD103"/>
+                  <a:srgbClr val="10427C"/>
                 </a:solidFill>
                 <a:latin typeface="Arial Narrow"/>
               </a:rPr>
-              <a:t>183</a:t>
-            </a:r>
-          </a:p>
-        </p:txBody>
-      </p:sp>
-      <p:sp>
-        <p:nvSpPr>
-          <p:cNvPr id="14" name="TextBox 13"/>
+              <a:t>The dashed circle</a:t>
+            </a:r>
+          </a:p>
+        </p:txBody>
+      </p:sp>
+      <p:sp>
+        <p:nvSpPr>
+          <p:cNvPr id="18" name="TextBox 17"/>
           <p:cNvSpPr txBox="1"/>
           <p:nvPr/>
         </p:nvSpPr>
         <p:spPr>
           <a:xfrm>
-            <a:off x="777240" y="3712463"/>
-            <a:ext cx="2194560" cy="384048"/>
+            <a:off x="5920008" y="4242816"/>
+            <a:ext cx="5768766" cy="676656"/>
+          </a:xfrm>
+          <a:prstGeom prst="rect">
+            <a:avLst/>
+          </a:prstGeom>
+          <a:noFill/>
+        </p:spPr>
+        <p:txBody>
+          <a:bodyPr wrap="square" lIns="0" rIns="0" tIns="0" bIns="0" anchor="t">
+            <a:spAutoFit/>
+          </a:bodyPr>
+          <a:lstStyle/>
+          <a:p>
+            <a:pPr algn="l">
+              <a:lnSpc>
+                <a:spcPct val="130000"/>
+              </a:lnSpc>
+            </a:pPr>
+            <a:r>
+              <a:rPr sz="1150" b="0">
+                <a:solidFill>
+                  <a:srgbClr val="58595B"/>
+                </a:solidFill>
+                <a:latin typeface="Arial"/>
+              </a:rPr>
+              <a:t>How far you have to go to reach fifty fields that pass the size, shape and cropland filters. Fields inside it without an outline failed one.</a:t>
+            </a:r>
+          </a:p>
+        </p:txBody>
+      </p:sp>
+      <p:sp>
+        <p:nvSpPr>
+          <p:cNvPr id="19" name="TextBox 18"/>
+          <p:cNvSpPr txBox="1"/>
+          <p:nvPr/>
+        </p:nvSpPr>
+        <p:spPr>
+          <a:xfrm>
+            <a:off x="5920008" y="4992624"/>
+            <a:ext cx="5768766" cy="256032"/>
           </a:xfrm>
           <a:prstGeom prst="rect">
             <a:avLst/>
@@ -18890,75 +21283,66 @@
               </a:lnSpc>
             </a:pPr>
             <a:r>
-              <a:rPr sz="1200" b="0">
+              <a:rPr sz="1300" b="1">
                 <a:solidFill>
-                  <a:srgbClr val="D6E0EC"/>
+                  <a:srgbClr val="10427C"/>
+                </a:solidFill>
+                <a:latin typeface="Arial Narrow"/>
+              </a:rPr>
+              <a:t>The orange field</a:t>
+            </a:r>
+          </a:p>
+        </p:txBody>
+      </p:sp>
+      <p:sp>
+        <p:nvSpPr>
+          <p:cNvPr id="20" name="TextBox 19"/>
+          <p:cNvSpPr txBox="1"/>
+          <p:nvPr/>
+        </p:nvSpPr>
+        <p:spPr>
+          <a:xfrm>
+            <a:off x="5920008" y="5266944"/>
+            <a:ext cx="5768766" cy="676656"/>
+          </a:xfrm>
+          <a:prstGeom prst="rect">
+            <a:avLst/>
+          </a:prstGeom>
+          <a:noFill/>
+        </p:spPr>
+        <p:txBody>
+          <a:bodyPr wrap="square" lIns="0" rIns="0" tIns="0" bIns="0" anchor="t">
+            <a:spAutoFit/>
+          </a:bodyPr>
+          <a:lstStyle/>
+          <a:p>
+            <a:pPr algn="l">
+              <a:lnSpc>
+                <a:spcPct val="130000"/>
+              </a:lnSpc>
+            </a:pPr>
+            <a:r>
+              <a:rPr sz="1150" b="0">
+                <a:solidFill>
+                  <a:srgbClr val="58595B"/>
                 </a:solidFill>
                 <a:latin typeface="Arial"/>
               </a:rPr>
-              <a:t>cotton field-years</a:t>
-            </a:r>
-          </a:p>
-        </p:txBody>
-      </p:sp>
-      <p:sp>
-        <p:nvSpPr>
-          <p:cNvPr id="15" name="Rounded Rectangle 14"/>
-          <p:cNvSpPr/>
-          <p:nvPr/>
-        </p:nvSpPr>
-        <p:spPr>
-          <a:xfrm>
-            <a:off x="3310128" y="2880360"/>
-            <a:ext cx="2624328" cy="1371600"/>
-          </a:xfrm>
-          <a:prstGeom prst="roundRect">
-            <a:avLst>
-              <a:gd name="adj" fmla="val 5000"/>
-            </a:avLst>
-          </a:prstGeom>
-          <a:solidFill>
-            <a:srgbClr val="1B5596"/>
-          </a:solidFill>
-          <a:ln w="12700">
-            <a:solidFill>
-              <a:srgbClr val="1B5596"/>
-            </a:solidFill>
-          </a:ln>
-          <a:effectLst/>
-        </p:spPr>
-        <p:style>
-          <a:lnRef idx="1">
-            <a:schemeClr val="accent1"/>
-          </a:lnRef>
-          <a:fillRef idx="3">
-            <a:schemeClr val="accent1"/>
-          </a:fillRef>
-          <a:effectRef idx="2">
-            <a:schemeClr val="accent1"/>
-          </a:effectRef>
-          <a:fontRef idx="minor">
-            <a:schemeClr val="lt1"/>
-          </a:fontRef>
-        </p:style>
-        <p:txBody>
-          <a:bodyPr rtlCol="0" anchor="ctr"/>
-          <a:lstStyle/>
-          <a:p>
-            <a:pPr algn="ctr"/>
-          </a:p>
-        </p:txBody>
-      </p:sp>
-      <p:sp>
-        <p:nvSpPr>
-          <p:cNvPr id="16" name="TextBox 15"/>
+              <a:t>The one being benchmarked. It is the only field in this picture anyone had to ask about.</a:t>
+            </a:r>
+          </a:p>
+        </p:txBody>
+      </p:sp>
+      <p:sp>
+        <p:nvSpPr>
+          <p:cNvPr id="21" name="TextBox 20"/>
           <p:cNvSpPr txBox="1"/>
           <p:nvPr/>
         </p:nvSpPr>
         <p:spPr>
           <a:xfrm>
-            <a:off x="3584448" y="3063240"/>
-            <a:ext cx="2194560" cy="603504"/>
+            <a:off x="502920" y="6199632"/>
+            <a:ext cx="11185855" cy="256032"/>
           </a:xfrm>
           <a:prstGeom prst="rect">
             <a:avLst/>
@@ -18977,382 +21361,13 @@
               </a:lnSpc>
             </a:pPr>
             <a:r>
-              <a:rPr sz="3400" b="1">
+              <a:rPr sz="900" b="0">
                 <a:solidFill>
-                  <a:srgbClr val="FFD103"/>
-                </a:solidFill>
-                <a:latin typeface="Arial Narrow"/>
-              </a:rPr>
-              <a:t>144</a:t>
-            </a:r>
-          </a:p>
-        </p:txBody>
-      </p:sp>
-      <p:sp>
-        <p:nvSpPr>
-          <p:cNvPr id="17" name="TextBox 16"/>
-          <p:cNvSpPr txBox="1"/>
-          <p:nvPr/>
-        </p:nvSpPr>
-        <p:spPr>
-          <a:xfrm>
-            <a:off x="3584448" y="3712463"/>
-            <a:ext cx="2194560" cy="384048"/>
-          </a:xfrm>
-          <a:prstGeom prst="rect">
-            <a:avLst/>
-          </a:prstGeom>
-          <a:noFill/>
-        </p:spPr>
-        <p:txBody>
-          <a:bodyPr wrap="square" lIns="0" rIns="0" tIns="0" bIns="0" anchor="t">
-            <a:spAutoFit/>
-          </a:bodyPr>
-          <a:lstStyle/>
-          <a:p>
-            <a:pPr algn="l">
-              <a:lnSpc>
-                <a:spcPct val="120000"/>
-              </a:lnSpc>
-            </a:pPr>
-            <a:r>
-              <a:rPr sz="1200" b="0">
-                <a:solidFill>
-                  <a:srgbClr val="D6E0EC"/>
+                  <a:srgbClr val="58595B"/>
                 </a:solidFill>
                 <a:latin typeface="Arial"/>
               </a:rPr>
-              <a:t>distinct cotton fields</a:t>
-            </a:r>
-          </a:p>
-        </p:txBody>
-      </p:sp>
-      <p:sp>
-        <p:nvSpPr>
-          <p:cNvPr id="18" name="Rounded Rectangle 17"/>
-          <p:cNvSpPr/>
-          <p:nvPr/>
-        </p:nvSpPr>
-        <p:spPr>
-          <a:xfrm>
-            <a:off x="6117336" y="2880360"/>
-            <a:ext cx="2624328" cy="1371600"/>
-          </a:xfrm>
-          <a:prstGeom prst="roundRect">
-            <a:avLst>
-              <a:gd name="adj" fmla="val 5000"/>
-            </a:avLst>
-          </a:prstGeom>
-          <a:solidFill>
-            <a:srgbClr val="1B5596"/>
-          </a:solidFill>
-          <a:ln w="12700">
-            <a:solidFill>
-              <a:srgbClr val="1B5596"/>
-            </a:solidFill>
-          </a:ln>
-          <a:effectLst/>
-        </p:spPr>
-        <p:style>
-          <a:lnRef idx="1">
-            <a:schemeClr val="accent1"/>
-          </a:lnRef>
-          <a:fillRef idx="3">
-            <a:schemeClr val="accent1"/>
-          </a:fillRef>
-          <a:effectRef idx="2">
-            <a:schemeClr val="accent1"/>
-          </a:effectRef>
-          <a:fontRef idx="minor">
-            <a:schemeClr val="lt1"/>
-          </a:fontRef>
-        </p:style>
-        <p:txBody>
-          <a:bodyPr rtlCol="0" anchor="ctr"/>
-          <a:lstStyle/>
-          <a:p>
-            <a:pPr algn="ctr"/>
-          </a:p>
-        </p:txBody>
-      </p:sp>
-      <p:sp>
-        <p:nvSpPr>
-          <p:cNvPr id="19" name="TextBox 18"/>
-          <p:cNvSpPr txBox="1"/>
-          <p:nvPr/>
-        </p:nvSpPr>
-        <p:spPr>
-          <a:xfrm>
-            <a:off x="6391655" y="3063240"/>
-            <a:ext cx="2194560" cy="603504"/>
-          </a:xfrm>
-          <a:prstGeom prst="rect">
-            <a:avLst/>
-          </a:prstGeom>
-          <a:noFill/>
-        </p:spPr>
-        <p:txBody>
-          <a:bodyPr wrap="square" lIns="0" rIns="0" tIns="0" bIns="0" anchor="t">
-            <a:spAutoFit/>
-          </a:bodyPr>
-          <a:lstStyle/>
-          <a:p>
-            <a:pPr algn="l">
-              <a:lnSpc>
-                <a:spcPct val="120000"/>
-              </a:lnSpc>
-            </a:pPr>
-            <a:r>
-              <a:rPr sz="3400" b="1">
-                <a:solidFill>
-                  <a:srgbClr val="FFD103"/>
-                </a:solidFill>
-                <a:latin typeface="Arial Narrow"/>
-              </a:rPr>
-              <a:t>34</a:t>
-            </a:r>
-          </a:p>
-        </p:txBody>
-      </p:sp>
-      <p:sp>
-        <p:nvSpPr>
-          <p:cNvPr id="20" name="TextBox 19"/>
-          <p:cNvSpPr txBox="1"/>
-          <p:nvPr/>
-        </p:nvSpPr>
-        <p:spPr>
-          <a:xfrm>
-            <a:off x="6391655" y="3712463"/>
-            <a:ext cx="2194560" cy="384048"/>
-          </a:xfrm>
-          <a:prstGeom prst="rect">
-            <a:avLst/>
-          </a:prstGeom>
-          <a:noFill/>
-        </p:spPr>
-        <p:txBody>
-          <a:bodyPr wrap="square" lIns="0" rIns="0" tIns="0" bIns="0" anchor="t">
-            <a:spAutoFit/>
-          </a:bodyPr>
-          <a:lstStyle/>
-          <a:p>
-            <a:pPr algn="l">
-              <a:lnSpc>
-                <a:spcPct val="120000"/>
-              </a:lnSpc>
-            </a:pPr>
-            <a:r>
-              <a:rPr sz="1200" b="0">
-                <a:solidFill>
-                  <a:srgbClr val="D6E0EC"/>
-                </a:solidFill>
-                <a:latin typeface="Arial"/>
-              </a:rPr>
-              <a:t>Georgia counties</a:t>
-            </a:r>
-          </a:p>
-        </p:txBody>
-      </p:sp>
-      <p:sp>
-        <p:nvSpPr>
-          <p:cNvPr id="21" name="Rounded Rectangle 20"/>
-          <p:cNvSpPr/>
-          <p:nvPr/>
-        </p:nvSpPr>
-        <p:spPr>
-          <a:xfrm>
-            <a:off x="8924544" y="2880360"/>
-            <a:ext cx="2624328" cy="1371600"/>
-          </a:xfrm>
-          <a:prstGeom prst="roundRect">
-            <a:avLst>
-              <a:gd name="adj" fmla="val 5000"/>
-            </a:avLst>
-          </a:prstGeom>
-          <a:solidFill>
-            <a:srgbClr val="1B5596"/>
-          </a:solidFill>
-          <a:ln w="12700">
-            <a:solidFill>
-              <a:srgbClr val="1B5596"/>
-            </a:solidFill>
-          </a:ln>
-          <a:effectLst/>
-        </p:spPr>
-        <p:style>
-          <a:lnRef idx="1">
-            <a:schemeClr val="accent1"/>
-          </a:lnRef>
-          <a:fillRef idx="3">
-            <a:schemeClr val="accent1"/>
-          </a:fillRef>
-          <a:effectRef idx="2">
-            <a:schemeClr val="accent1"/>
-          </a:effectRef>
-          <a:fontRef idx="minor">
-            <a:schemeClr val="lt1"/>
-          </a:fontRef>
-        </p:style>
-        <p:txBody>
-          <a:bodyPr rtlCol="0" anchor="ctr"/>
-          <a:lstStyle/>
-          <a:p>
-            <a:pPr algn="ctr"/>
-          </a:p>
-        </p:txBody>
-      </p:sp>
-      <p:sp>
-        <p:nvSpPr>
-          <p:cNvPr id="22" name="TextBox 21"/>
-          <p:cNvSpPr txBox="1"/>
-          <p:nvPr/>
-        </p:nvSpPr>
-        <p:spPr>
-          <a:xfrm>
-            <a:off x="9198864" y="3063240"/>
-            <a:ext cx="2194560" cy="603504"/>
-          </a:xfrm>
-          <a:prstGeom prst="rect">
-            <a:avLst/>
-          </a:prstGeom>
-          <a:noFill/>
-        </p:spPr>
-        <p:txBody>
-          <a:bodyPr wrap="square" lIns="0" rIns="0" tIns="0" bIns="0" anchor="t">
-            <a:spAutoFit/>
-          </a:bodyPr>
-          <a:lstStyle/>
-          <a:p>
-            <a:pPr algn="l">
-              <a:lnSpc>
-                <a:spcPct val="120000"/>
-              </a:lnSpc>
-            </a:pPr>
-            <a:r>
-              <a:rPr sz="3400" b="1">
-                <a:solidFill>
-                  <a:srgbClr val="FFD103"/>
-                </a:solidFill>
-                <a:latin typeface="Arial Narrow"/>
-              </a:rPr>
-              <a:t>21,129</a:t>
-            </a:r>
-          </a:p>
-        </p:txBody>
-      </p:sp>
-      <p:sp>
-        <p:nvSpPr>
-          <p:cNvPr id="23" name="TextBox 22"/>
-          <p:cNvSpPr txBox="1"/>
-          <p:nvPr/>
-        </p:nvSpPr>
-        <p:spPr>
-          <a:xfrm>
-            <a:off x="9198864" y="3712463"/>
-            <a:ext cx="2194560" cy="384048"/>
-          </a:xfrm>
-          <a:prstGeom prst="rect">
-            <a:avLst/>
-          </a:prstGeom>
-          <a:noFill/>
-        </p:spPr>
-        <p:txBody>
-          <a:bodyPr wrap="square" lIns="0" rIns="0" tIns="0" bIns="0" anchor="t">
-            <a:spAutoFit/>
-          </a:bodyPr>
-          <a:lstStyle/>
-          <a:p>
-            <a:pPr algn="l">
-              <a:lnSpc>
-                <a:spcPct val="120000"/>
-              </a:lnSpc>
-            </a:pPr>
-            <a:r>
-              <a:rPr sz="1200" b="0">
-                <a:solidFill>
-                  <a:srgbClr val="D6E0EC"/>
-                </a:solidFill>
-                <a:latin typeface="Arial"/>
-              </a:rPr>
-              <a:t>acres of cotton</a:t>
-            </a:r>
-          </a:p>
-        </p:txBody>
-      </p:sp>
-      <p:sp>
-        <p:nvSpPr>
-          <p:cNvPr id="24" name="TextBox 23"/>
-          <p:cNvSpPr txBox="1"/>
-          <p:nvPr/>
-        </p:nvSpPr>
-        <p:spPr>
-          <a:xfrm>
-            <a:off x="502920" y="4572000"/>
-            <a:ext cx="10515600" cy="685800"/>
-          </a:xfrm>
-          <a:prstGeom prst="rect">
-            <a:avLst/>
-          </a:prstGeom>
-          <a:noFill/>
-        </p:spPr>
-        <p:txBody>
-          <a:bodyPr wrap="square" lIns="0" rIns="0" tIns="0" bIns="0" anchor="t">
-            <a:spAutoFit/>
-          </a:bodyPr>
-          <a:lstStyle/>
-          <a:p>
-            <a:pPr algn="l">
-              <a:lnSpc>
-                <a:spcPct val="135000"/>
-              </a:lnSpc>
-            </a:pPr>
-            <a:r>
-              <a:rPr sz="1400" b="0">
-                <a:solidFill>
-                  <a:srgbClr val="D6E0EC"/>
-                </a:solidFill>
-                <a:latin typeface="Arial"/>
-              </a:rPr>
-              <a:t>Every field-year was scored blind: the pipeline never saw the survey answers. Accuracy figures below are cross-validated by field, so repeat years of one farm cannot flatter the result.</a:t>
-            </a:r>
-          </a:p>
-        </p:txBody>
-      </p:sp>
-      <p:sp>
-        <p:nvSpPr>
-          <p:cNvPr id="25" name="TextBox 24"/>
-          <p:cNvSpPr txBox="1"/>
-          <p:nvPr/>
-        </p:nvSpPr>
-        <p:spPr>
-          <a:xfrm>
-            <a:off x="502920" y="6199632"/>
-            <a:ext cx="11185855" cy="256032"/>
-          </a:xfrm>
-          <a:prstGeom prst="rect">
-            <a:avLst/>
-          </a:prstGeom>
-          <a:noFill/>
-        </p:spPr>
-        <p:txBody>
-          <a:bodyPr wrap="square" lIns="0" rIns="0" tIns="0" bIns="0" anchor="t">
-            <a:spAutoFit/>
-          </a:bodyPr>
-          <a:lstStyle/>
-          <a:p>
-            <a:pPr algn="l">
-              <a:lnSpc>
-                <a:spcPct val="120000"/>
-              </a:lnSpc>
-            </a:pPr>
-            <a:r>
-              <a:rPr sz="900" b="0">
-                <a:solidFill>
-                  <a:srgbClr val="D6E0EC"/>
-                </a:solidFill>
-                <a:latin typeface="Arial"/>
-              </a:rPr>
-              <a:t>Survey years 2018–2021. Median field 82 acres. 78% irrigated.</a:t>
+              <a:t>Field boundaries: USDA FSA Common Land Unit, 2008 public release, geometry and acreage only. County inset from the US Census Bureau.</a:t>
             </a:r>
           </a:p>
         </p:txBody>
@@ -19497,7 +21512,7 @@
                 </a:solidFill>
                 <a:latin typeface="Arial Narrow"/>
               </a:rPr>
-              <a:t>The cotton scorecard</a:t>
+              <a:t>Benchmark a cotton field against its cotton neighbours</a:t>
             </a:r>
           </a:p>
         </p:txBody>
@@ -19790,513 +21805,16 @@
           </a:p>
         </p:txBody>
       </p:sp>
-      <p:graphicFrame>
-        <p:nvGraphicFramePr>
-          <p:cNvPr id="12" name="Table 11"/>
-          <p:cNvGraphicFramePr>
-            <a:graphicFrameLocks noGrp="1"/>
-          </p:cNvGraphicFramePr>
-          <p:nvPr/>
-        </p:nvGraphicFramePr>
-        <p:xfrm>
-          <a:off x="502920" y="1444752"/>
-          <a:ext cx="10835638" cy="1792224"/>
-        </p:xfrm>
-        <a:graphic>
-          <a:graphicData uri="http://schemas.openxmlformats.org/drawingml/2006/table">
-            <a:tbl>
-              <a:tblPr firstRow="1" bandRow="1">
-                <a:tableStyleId>{5C22544A-7EE6-4342-B048-85BDC9FD1C3A}</a:tableStyleId>
-              </a:tblPr>
-              <a:tblGrid>
-                <a:gridCol w="3334043"/>
-                <a:gridCol w="1667021"/>
-                <a:gridCol w="1667021"/>
-                <a:gridCol w="2292154"/>
-                <a:gridCol w="1875399"/>
-              </a:tblGrid>
-              <a:tr h="420624">
-                <a:tc>
-                  <a:txBody>
-                    <a:bodyPr/>
-                    <a:lstStyle/>
-                    <a:p>
-                      <a:pPr algn="l"/>
-                      <a:r>
-                        <a:rPr sz="1300" b="1">
-                          <a:solidFill>
-                            <a:srgbClr val="FFFFFF"/>
-                          </a:solidFill>
-                          <a:latin typeface="Arial Narrow"/>
-                        </a:rPr>
-                        <a:t>What we measure</a:t>
-                      </a:r>
-                    </a:p>
-                  </a:txBody>
-                  <a:tcPr marL="73152" marR="73152" marT="18288" marB="18288" anchor="ctr">
-                    <a:solidFill>
-                      <a:srgbClr val="10427C"/>
-                    </a:solidFill>
-                  </a:tcPr>
-                </a:tc>
-                <a:tc>
-                  <a:txBody>
-                    <a:bodyPr/>
-                    <a:lstStyle/>
-                    <a:p>
-                      <a:pPr algn="ctr"/>
-                      <a:r>
-                        <a:rPr sz="1300" b="1">
-                          <a:solidFill>
-                            <a:srgbClr val="FFFFFF"/>
-                          </a:solidFill>
-                          <a:latin typeface="Arial Narrow"/>
-                        </a:rPr>
-                        <a:t>Field-years</a:t>
-                      </a:r>
-                    </a:p>
-                  </a:txBody>
-                  <a:tcPr marL="73152" marR="73152" marT="18288" marB="18288" anchor="ctr">
-                    <a:solidFill>
-                      <a:srgbClr val="10427C"/>
-                    </a:solidFill>
-                  </a:tcPr>
-                </a:tc>
-                <a:tc>
-                  <a:txBody>
-                    <a:bodyPr/>
-                    <a:lstStyle/>
-                    <a:p>
-                      <a:pPr algn="ctr"/>
-                      <a:r>
-                        <a:rPr sz="1300" b="1">
-                          <a:solidFill>
-                            <a:srgbClr val="FFFFFF"/>
-                          </a:solidFill>
-                          <a:latin typeface="Arial Narrow"/>
-                        </a:rPr>
-                        <a:t>Correct</a:t>
-                      </a:r>
-                    </a:p>
-                  </a:txBody>
-                  <a:tcPr marL="73152" marR="73152" marT="18288" marB="18288" anchor="ctr">
-                    <a:solidFill>
-                      <a:srgbClr val="10427C"/>
-                    </a:solidFill>
-                  </a:tcPr>
-                </a:tc>
-                <a:tc>
-                  <a:txBody>
-                    <a:bodyPr/>
-                    <a:lstStyle/>
-                    <a:p>
-                      <a:pPr algn="ctr"/>
-                      <a:r>
-                        <a:rPr sz="1300" b="1">
-                          <a:solidFill>
-                            <a:srgbClr val="FFFFFF"/>
-                          </a:solidFill>
-                          <a:latin typeface="Arial Narrow"/>
-                        </a:rPr>
-                        <a:t>Catches</a:t>
-                      </a:r>
-                    </a:p>
-                  </a:txBody>
-                  <a:tcPr marL="73152" marR="73152" marT="18288" marB="18288" anchor="ctr">
-                    <a:solidFill>
-                      <a:srgbClr val="10427C"/>
-                    </a:solidFill>
-                  </a:tcPr>
-                </a:tc>
-                <a:tc>
-                  <a:txBody>
-                    <a:bodyPr/>
-                    <a:lstStyle/>
-                    <a:p>
-                      <a:pPr algn="ctr"/>
-                      <a:r>
-                        <a:rPr sz="1300" b="1">
-                          <a:solidFill>
-                            <a:srgbClr val="FFFFFF"/>
-                          </a:solidFill>
-                          <a:latin typeface="Arial Narrow"/>
-                        </a:rPr>
-                        <a:t>False alarms</a:t>
-                      </a:r>
-                    </a:p>
-                  </a:txBody>
-                  <a:tcPr marL="73152" marR="73152" marT="18288" marB="18288" anchor="ctr">
-                    <a:solidFill>
-                      <a:srgbClr val="10427C"/>
-                    </a:solidFill>
-                  </a:tcPr>
-                </a:tc>
-              </a:tr>
-              <a:tr h="457200">
-                <a:tc>
-                  <a:txBody>
-                    <a:bodyPr/>
-                    <a:lstStyle/>
-                    <a:p>
-                      <a:pPr algn="l"/>
-                      <a:r>
-                        <a:rPr sz="1300" b="0">
-                          <a:solidFill>
-                            <a:srgbClr val="444444"/>
-                          </a:solidFill>
-                          <a:latin typeface="Arial"/>
-                        </a:rPr>
-                        <a:t>Crop is cotton</a:t>
-                      </a:r>
-                    </a:p>
-                  </a:txBody>
-                  <a:tcPr marL="73152" marR="73152" marT="18288" marB="18288" anchor="ctr">
-                    <a:solidFill>
-                      <a:srgbClr val="FFFFFF"/>
-                    </a:solidFill>
-                  </a:tcPr>
-                </a:tc>
-                <a:tc>
-                  <a:txBody>
-                    <a:bodyPr/>
-                    <a:lstStyle/>
-                    <a:p>
-                      <a:pPr algn="ctr"/>
-                      <a:r>
-                        <a:rPr sz="1300" b="0">
-                          <a:solidFill>
-                            <a:srgbClr val="444444"/>
-                          </a:solidFill>
-                          <a:latin typeface="Arial"/>
-                        </a:rPr>
-                        <a:t>183</a:t>
-                      </a:r>
-                    </a:p>
-                  </a:txBody>
-                  <a:tcPr marL="73152" marR="73152" marT="18288" marB="18288" anchor="ctr">
-                    <a:solidFill>
-                      <a:srgbClr val="FFFFFF"/>
-                    </a:solidFill>
-                  </a:tcPr>
-                </a:tc>
-                <a:tc>
-                  <a:txBody>
-                    <a:bodyPr/>
-                    <a:lstStyle/>
-                    <a:p>
-                      <a:pPr algn="ctr"/>
-                      <a:r>
-                        <a:rPr sz="1300" b="1">
-                          <a:solidFill>
-                            <a:srgbClr val="10427C"/>
-                          </a:solidFill>
-                          <a:latin typeface="Arial"/>
-                        </a:rPr>
-                        <a:t>85.2%</a:t>
-                      </a:r>
-                    </a:p>
-                  </a:txBody>
-                  <a:tcPr marL="73152" marR="73152" marT="18288" marB="18288" anchor="ctr">
-                    <a:solidFill>
-                      <a:srgbClr val="FFFFFF"/>
-                    </a:solidFill>
-                  </a:tcPr>
-                </a:tc>
-                <a:tc>
-                  <a:txBody>
-                    <a:bodyPr/>
-                    <a:lstStyle/>
-                    <a:p>
-                      <a:pPr algn="ctr"/>
-                      <a:r>
-                        <a:rPr sz="1300" b="0">
-                          <a:solidFill>
-                            <a:srgbClr val="444444"/>
-                          </a:solidFill>
-                          <a:latin typeface="Arial"/>
-                        </a:rPr>
-                        <a:t>156 of 183</a:t>
-                      </a:r>
-                    </a:p>
-                  </a:txBody>
-                  <a:tcPr marL="73152" marR="73152" marT="18288" marB="18288" anchor="ctr">
-                    <a:solidFill>
-                      <a:srgbClr val="FFFFFF"/>
-                    </a:solidFill>
-                  </a:tcPr>
-                </a:tc>
-                <a:tc>
-                  <a:txBody>
-                    <a:bodyPr/>
-                    <a:lstStyle/>
-                    <a:p>
-                      <a:pPr algn="ctr"/>
-                      <a:r>
-                        <a:rPr sz="1300" b="0">
-                          <a:solidFill>
-                            <a:srgbClr val="444444"/>
-                          </a:solidFill>
-                          <a:latin typeface="Arial"/>
-                        </a:rPr>
-                        <a:t>25</a:t>
-                      </a:r>
-                    </a:p>
-                  </a:txBody>
-                  <a:tcPr marL="73152" marR="73152" marT="18288" marB="18288" anchor="ctr">
-                    <a:solidFill>
-                      <a:srgbClr val="FFFFFF"/>
-                    </a:solidFill>
-                  </a:tcPr>
-                </a:tc>
-              </a:tr>
-              <a:tr h="457200">
-                <a:tc>
-                  <a:txBody>
-                    <a:bodyPr/>
-                    <a:lstStyle/>
-                    <a:p>
-                      <a:pPr algn="l"/>
-                      <a:r>
-                        <a:rPr sz="1300" b="0">
-                          <a:solidFill>
-                            <a:srgbClr val="444444"/>
-                          </a:solidFill>
-                          <a:latin typeface="Arial"/>
-                        </a:rPr>
-                        <a:t>Cover crop grown</a:t>
-                      </a:r>
-                    </a:p>
-                  </a:txBody>
-                  <a:tcPr marL="73152" marR="73152" marT="18288" marB="18288" anchor="ctr">
-                    <a:solidFill>
-                      <a:srgbClr val="EEEEEE"/>
-                    </a:solidFill>
-                  </a:tcPr>
-                </a:tc>
-                <a:tc>
-                  <a:txBody>
-                    <a:bodyPr/>
-                    <a:lstStyle/>
-                    <a:p>
-                      <a:pPr algn="ctr"/>
-                      <a:r>
-                        <a:rPr sz="1300" b="0">
-                          <a:solidFill>
-                            <a:srgbClr val="444444"/>
-                          </a:solidFill>
-                          <a:latin typeface="Arial"/>
-                        </a:rPr>
-                        <a:t>182</a:t>
-                      </a:r>
-                    </a:p>
-                  </a:txBody>
-                  <a:tcPr marL="73152" marR="73152" marT="18288" marB="18288" anchor="ctr">
-                    <a:solidFill>
-                      <a:srgbClr val="EEEEEE"/>
-                    </a:solidFill>
-                  </a:tcPr>
-                </a:tc>
-                <a:tc>
-                  <a:txBody>
-                    <a:bodyPr/>
-                    <a:lstStyle/>
-                    <a:p>
-                      <a:pPr algn="ctr"/>
-                      <a:r>
-                        <a:rPr sz="1300" b="1">
-                          <a:solidFill>
-                            <a:srgbClr val="10427C"/>
-                          </a:solidFill>
-                          <a:latin typeface="Arial"/>
-                        </a:rPr>
-                        <a:t>75.3%</a:t>
-                      </a:r>
-                    </a:p>
-                  </a:txBody>
-                  <a:tcPr marL="73152" marR="73152" marT="18288" marB="18288" anchor="ctr">
-                    <a:solidFill>
-                      <a:srgbClr val="EEEEEE"/>
-                    </a:solidFill>
-                  </a:tcPr>
-                </a:tc>
-                <a:tc>
-                  <a:txBody>
-                    <a:bodyPr/>
-                    <a:lstStyle/>
-                    <a:p>
-                      <a:pPr algn="ctr"/>
-                      <a:r>
-                        <a:rPr sz="1300" b="0">
-                          <a:solidFill>
-                            <a:srgbClr val="444444"/>
-                          </a:solidFill>
-                          <a:latin typeface="Arial"/>
-                        </a:rPr>
-                        <a:t>111 of 114</a:t>
-                      </a:r>
-                    </a:p>
-                  </a:txBody>
-                  <a:tcPr marL="73152" marR="73152" marT="18288" marB="18288" anchor="ctr">
-                    <a:solidFill>
-                      <a:srgbClr val="EEEEEE"/>
-                    </a:solidFill>
-                  </a:tcPr>
-                </a:tc>
-                <a:tc>
-                  <a:txBody>
-                    <a:bodyPr/>
-                    <a:lstStyle/>
-                    <a:p>
-                      <a:pPr algn="ctr"/>
-                      <a:r>
-                        <a:rPr sz="1300" b="0">
-                          <a:solidFill>
-                            <a:srgbClr val="444444"/>
-                          </a:solidFill>
-                          <a:latin typeface="Arial"/>
-                        </a:rPr>
-                        <a:t>42</a:t>
-                      </a:r>
-                    </a:p>
-                  </a:txBody>
-                  <a:tcPr marL="73152" marR="73152" marT="18288" marB="18288" anchor="ctr">
-                    <a:solidFill>
-                      <a:srgbClr val="EEEEEE"/>
-                    </a:solidFill>
-                  </a:tcPr>
-                </a:tc>
-              </a:tr>
-              <a:tr h="457200">
-                <a:tc>
-                  <a:txBody>
-                    <a:bodyPr/>
-                    <a:lstStyle/>
-                    <a:p>
-                      <a:pPr algn="l"/>
-                      <a:r>
-                        <a:rPr sz="1300" b="0">
-                          <a:solidFill>
-                            <a:srgbClr val="444444"/>
-                          </a:solidFill>
-                          <a:latin typeface="Arial"/>
-                        </a:rPr>
-                        <a:t>Conservation tillage</a:t>
-                      </a:r>
-                    </a:p>
-                  </a:txBody>
-                  <a:tcPr marL="73152" marR="73152" marT="18288" marB="18288" anchor="ctr">
-                    <a:solidFill>
-                      <a:srgbClr val="FFFFFF"/>
-                    </a:solidFill>
-                  </a:tcPr>
-                </a:tc>
-                <a:tc>
-                  <a:txBody>
-                    <a:bodyPr/>
-                    <a:lstStyle/>
-                    <a:p>
-                      <a:pPr algn="ctr"/>
-                      <a:r>
-                        <a:rPr sz="1300" b="0">
-                          <a:solidFill>
-                            <a:srgbClr val="444444"/>
-                          </a:solidFill>
-                          <a:latin typeface="Arial"/>
-                        </a:rPr>
-                        <a:t>174</a:t>
-                      </a:r>
-                    </a:p>
-                  </a:txBody>
-                  <a:tcPr marL="73152" marR="73152" marT="18288" marB="18288" anchor="ctr">
-                    <a:solidFill>
-                      <a:srgbClr val="FFFFFF"/>
-                    </a:solidFill>
-                  </a:tcPr>
-                </a:tc>
-                <a:tc>
-                  <a:txBody>
-                    <a:bodyPr/>
-                    <a:lstStyle/>
-                    <a:p>
-                      <a:pPr algn="ctr"/>
-                      <a:r>
-                        <a:rPr sz="1300" b="1">
-                          <a:solidFill>
-                            <a:srgbClr val="10427C"/>
-                          </a:solidFill>
-                          <a:latin typeface="Arial"/>
-                        </a:rPr>
-                        <a:t>76.4%</a:t>
-                      </a:r>
-                    </a:p>
-                  </a:txBody>
-                  <a:tcPr marL="73152" marR="73152" marT="18288" marB="18288" anchor="ctr">
-                    <a:solidFill>
-                      <a:srgbClr val="FFFFFF"/>
-                    </a:solidFill>
-                  </a:tcPr>
-                </a:tc>
-                <a:tc>
-                  <a:txBody>
-                    <a:bodyPr/>
-                    <a:lstStyle/>
-                    <a:p>
-                      <a:pPr algn="ctr"/>
-                      <a:r>
-                        <a:rPr sz="1300" b="0">
-                          <a:solidFill>
-                            <a:srgbClr val="444444"/>
-                          </a:solidFill>
-                          <a:latin typeface="Arial"/>
-                        </a:rPr>
-                        <a:t>105 of 126</a:t>
-                      </a:r>
-                    </a:p>
-                  </a:txBody>
-                  <a:tcPr marL="73152" marR="73152" marT="18288" marB="18288" anchor="ctr">
-                    <a:solidFill>
-                      <a:srgbClr val="FFFFFF"/>
-                    </a:solidFill>
-                  </a:tcPr>
-                </a:tc>
-                <a:tc>
-                  <a:txBody>
-                    <a:bodyPr/>
-                    <a:lstStyle/>
-                    <a:p>
-                      <a:pPr algn="ctr"/>
-                      <a:r>
-                        <a:rPr sz="1300" b="0">
-                          <a:solidFill>
-                            <a:srgbClr val="444444"/>
-                          </a:solidFill>
-                          <a:latin typeface="Arial"/>
-                        </a:rPr>
-                        <a:t>20</a:t>
-                      </a:r>
-                    </a:p>
-                  </a:txBody>
-                  <a:tcPr marL="73152" marR="73152" marT="18288" marB="18288" anchor="ctr">
-                    <a:solidFill>
-                      <a:srgbClr val="FFFFFF"/>
-                    </a:solidFill>
-                  </a:tcPr>
-                </a:tc>
-              </a:tr>
-            </a:tbl>
-          </a:graphicData>
-        </a:graphic>
-      </p:graphicFrame>
-      <p:sp>
-        <p:nvSpPr>
-          <p:cNvPr id="13" name="TextBox 12"/>
+      <p:sp>
+        <p:nvSpPr>
+          <p:cNvPr id="12" name="TextBox 11"/>
           <p:cNvSpPr txBox="1"/>
           <p:nvPr/>
         </p:nvSpPr>
         <p:spPr>
           <a:xfrm>
-            <a:off x="502920" y="3520440"/>
-            <a:ext cx="5212080" cy="914400"/>
+            <a:off x="502920" y="1444752"/>
+            <a:ext cx="10424160" cy="457200"/>
           </a:xfrm>
           <a:prstGeom prst="rect">
             <a:avLst/>
@@ -20315,36 +21833,99 @@
               </a:lnSpc>
             </a:pPr>
             <a:r>
-              <a:rPr sz="1300" b="1">
+              <a:rPr sz="1500" b="0">
                 <a:solidFill>
                   <a:srgbClr val="58595B"/>
                 </a:solidFill>
                 <a:latin typeface="Arial"/>
               </a:rPr>
-              <a:t>Cotton is the strong crop. </a:t>
-            </a:r>
-            <a:r>
-              <a:rPr sz="1300" b="0">
+              <a:t>Mitchell County, Georgia, 2024. Twenty-two cotton fields inside 3.9 km, 1,870 acres, every one read from free imagery. No grower enrolled, and none of the neighbours was contacted.</a:t>
+            </a:r>
+          </a:p>
+        </p:txBody>
+      </p:sp>
+      <p:pic>
+        <p:nvPicPr>
+          <p:cNvPr id="13" name="Picture 12" descr="cotton_benchmark.png"/>
+          <p:cNvPicPr>
+            <a:picLocks noChangeAspect="1"/>
+          </p:cNvPicPr>
+          <p:nvPr/>
+        </p:nvPicPr>
+        <p:blipFill>
+          <a:blip r:embed="rId3"/>
+          <a:stretch>
+            <a:fillRect/>
+          </a:stretch>
+        </p:blipFill>
+        <p:spPr>
+          <a:xfrm>
+            <a:off x="1901494" y="2029968"/>
+            <a:ext cx="8704696" cy="3017520"/>
+          </a:xfrm>
+          <a:prstGeom prst="rect">
+            <a:avLst/>
+          </a:prstGeom>
+        </p:spPr>
+      </p:pic>
+      <p:sp>
+        <p:nvSpPr>
+          <p:cNvPr id="14" name="TextBox 13"/>
+          <p:cNvSpPr txBox="1"/>
+          <p:nvPr/>
+        </p:nvSpPr>
+        <p:spPr>
+          <a:xfrm>
+            <a:off x="502920" y="5230368"/>
+            <a:ext cx="5212080" cy="868680"/>
+          </a:xfrm>
+          <a:prstGeom prst="rect">
+            <a:avLst/>
+          </a:prstGeom>
+          <a:noFill/>
+        </p:spPr>
+        <p:txBody>
+          <a:bodyPr wrap="square" lIns="0" rIns="0" tIns="0" bIns="0" anchor="t">
+            <a:spAutoFit/>
+          </a:bodyPr>
+          <a:lstStyle/>
+          <a:p>
+            <a:pPr algn="l">
+              <a:lnSpc>
+                <a:spcPct val="130000"/>
+              </a:lnSpc>
+            </a:pPr>
+            <a:r>
+              <a:rPr sz="1200" b="1">
                 <a:solidFill>
                   <a:srgbClr val="58595B"/>
                 </a:solidFill>
                 <a:latin typeface="Arial"/>
               </a:rPr>
-              <a:t>It misses almost nothing: 97% of cover crops and 83% of conservation-tilled fields are caught.</a:t>
-            </a:r>
-          </a:p>
-        </p:txBody>
-      </p:sp>
-      <p:sp>
-        <p:nvSpPr>
-          <p:cNvPr id="14" name="TextBox 13"/>
+              <a:t>Cotton carries two and a half times the pre-planting cover of the peanut ground around it. </a:t>
+            </a:r>
+            <a:r>
+              <a:rPr sz="1200" b="0">
+                <a:solidFill>
+                  <a:srgbClr val="58595B"/>
+                </a:solidFill>
+                <a:latin typeface="Arial"/>
+              </a:rPr>
+              <a:t>Peanut harvest inverts the row and leaves almost nothing, so a cotton field looks good against a mixed neighbourhood for reasons that have nothing to do with the farmer.</a:t>
+            </a:r>
+          </a:p>
+        </p:txBody>
+      </p:sp>
+      <p:sp>
+        <p:nvSpPr>
+          <p:cNvPr id="15" name="TextBox 14"/>
           <p:cNvSpPr txBox="1"/>
           <p:nvPr/>
         </p:nvSpPr>
         <p:spPr>
           <a:xfrm>
-            <a:off x="6126480" y="3520440"/>
-            <a:ext cx="5212080" cy="914400"/>
+            <a:off x="6126480" y="5230368"/>
+            <a:ext cx="5212080" cy="868680"/>
           </a:xfrm>
           <a:prstGeom prst="rect">
             <a:avLst/>
@@ -20363,29 +21944,29 @@
               </a:lnSpc>
             </a:pPr>
             <a:r>
-              <a:rPr sz="1300" b="1">
+              <a:rPr sz="1200" b="1">
                 <a:solidFill>
                   <a:srgbClr val="58595B"/>
                 </a:solidFill>
                 <a:latin typeface="Arial"/>
               </a:rPr>
-              <a:t>False alarms are the weak point. </a:t>
-            </a:r>
-            <a:r>
-              <a:rPr sz="1300" b="0">
+              <a:t>Compared with cotton, this field is 47th percentile. Compared with everything around it, 72nd. </a:t>
+            </a:r>
+            <a:r>
+              <a:rPr sz="1200" b="0">
                 <a:solidFill>
                   <a:srgbClr val="58595B"/>
                 </a:solidFill>
                 <a:latin typeface="Arial"/>
               </a:rPr>
-              <a:t>The system over-calls conservation practice, which is exactly what calibration data fixes.</a:t>
-            </a:r>
-          </a:p>
-        </p:txBody>
-      </p:sp>
-      <p:sp>
-        <p:nvSpPr>
-          <p:cNvPr id="15" name="TextBox 14"/>
+              <a:t>That 25-point difference is the crop -- and it is why a cotton benchmark has to be built on cotton.</a:t>
+            </a:r>
+          </a:p>
+        </p:txBody>
+      </p:sp>
+      <p:sp>
+        <p:nvSpPr>
+          <p:cNvPr id="16" name="TextBox 15"/>
           <p:cNvSpPr txBox="1"/>
           <p:nvPr/>
         </p:nvSpPr>
@@ -20417,7 +21998,7 @@
                 </a:solidFill>
                 <a:latin typeface="Arial"/>
               </a:rPr>
-              <a:t>Cover crop and tillage thresholds fitted in-sample; cross-validated they fall to 75.2% and 73.8%.</a:t>
+              <a:t>Pre-planting soil cover, 2024. Twenty of the twenty-two cotton fields had enough clear images in the window to produce a reading.</a:t>
             </a:r>
           </a:p>
         </p:txBody>
